--- a/Tutorium Mathe/Tutorium4_Slides.pptx
+++ b/Tutorium Mathe/Tutorium4_Slides.pptx
@@ -5,10 +5,10 @@
     <p:sldMasterId id="2147483728" r:id="rId2"/>
   </p:sldMasterIdLst>
   <p:notesMasterIdLst>
-    <p:notesMasterId r:id="rId10"/>
+    <p:notesMasterId r:id="rId12"/>
   </p:notesMasterIdLst>
   <p:handoutMasterIdLst>
-    <p:handoutMasterId r:id="rId11"/>
+    <p:handoutMasterId r:id="rId13"/>
   </p:handoutMasterIdLst>
   <p:sldIdLst>
     <p:sldId id="256" r:id="rId3"/>
@@ -18,6 +18,8 @@
     <p:sldId id="261" r:id="rId7"/>
     <p:sldId id="262" r:id="rId8"/>
     <p:sldId id="263" r:id="rId9"/>
+    <p:sldId id="264" r:id="rId10"/>
+    <p:sldId id="265" r:id="rId11"/>
   </p:sldIdLst>
   <p:sldSz cx="12192000" cy="6858000"/>
   <p:notesSz cx="6858000" cy="9144000"/>
@@ -221,7 +223,7 @@
           <a:p>
             <a:fld id="{B535FBCA-7827-204B-8916-3BD441F72BB8}" type="datetimeFigureOut">
               <a:rPr lang="de-DE" smtClean="0"/>
-              <a:t>17.11.24</a:t>
+              <a:t>20.11.24</a:t>
             </a:fld>
             <a:endParaRPr lang="de-DE"/>
           </a:p>
@@ -414,7 +416,7 @@
           <a:p>
             <a:fld id="{842CE5A1-857B-214D-8BEE-AF65CEFCD544}" type="datetimeFigureOut">
               <a:rPr lang="de-DE" smtClean="0"/>
-              <a:t>17.11.24</a:t>
+              <a:t>20.11.24</a:t>
             </a:fld>
             <a:endParaRPr lang="de-DE"/>
           </a:p>
@@ -4283,8 +4285,8 @@
           </a:p>
         </p:txBody>
       </p:sp>
-      <mc:AlternateContent xmlns:mc="http://schemas.openxmlformats.org/markup-compatibility/2006">
-        <mc:Choice xmlns:a14="http://schemas.microsoft.com/office/drawing/2010/main" Requires="a14">
+      <mc:AlternateContent xmlns:mc="http://schemas.openxmlformats.org/markup-compatibility/2006" xmlns:a14="http://schemas.microsoft.com/office/drawing/2010/main">
+        <mc:Choice Requires="a14">
           <p:sp>
             <p:nvSpPr>
               <p:cNvPr id="2" name="Inhaltsplatzhalter 1">
@@ -5317,7 +5319,7 @@
             </p:txBody>
           </p:sp>
         </mc:Choice>
-        <mc:Fallback>
+        <mc:Fallback xmlns="">
           <p:sp>
             <p:nvSpPr>
               <p:cNvPr id="2" name="Inhaltsplatzhalter 1">
@@ -5387,8 +5389,8 @@
           <a:chExt cx="0" cy="0"/>
         </a:xfrm>
       </p:grpSpPr>
-      <mc:AlternateContent xmlns:mc="http://schemas.openxmlformats.org/markup-compatibility/2006">
-        <mc:Choice xmlns:a14="http://schemas.microsoft.com/office/drawing/2010/main" Requires="a14">
+      <mc:AlternateContent xmlns:mc="http://schemas.openxmlformats.org/markup-compatibility/2006" xmlns:a14="http://schemas.microsoft.com/office/drawing/2010/main">
+        <mc:Choice Requires="a14">
           <p:sp>
             <p:nvSpPr>
               <p:cNvPr id="2" name="Inhaltsplatzhalter 1">
@@ -5519,7 +5521,7 @@
             </p:txBody>
           </p:sp>
         </mc:Choice>
-        <mc:Fallback>
+        <mc:Fallback xmlns="">
           <p:sp>
             <p:nvSpPr>
               <p:cNvPr id="2" name="Inhaltsplatzhalter 1">
@@ -5647,8 +5649,8 @@
           <a:chExt cx="0" cy="0"/>
         </a:xfrm>
       </p:grpSpPr>
-      <mc:AlternateContent xmlns:mc="http://schemas.openxmlformats.org/markup-compatibility/2006">
-        <mc:Choice xmlns:a14="http://schemas.microsoft.com/office/drawing/2010/main" Requires="a14">
+      <mc:AlternateContent xmlns:mc="http://schemas.openxmlformats.org/markup-compatibility/2006" xmlns:a14="http://schemas.microsoft.com/office/drawing/2010/main">
+        <mc:Choice Requires="a14">
           <p:sp>
             <p:nvSpPr>
               <p:cNvPr id="2" name="Inhaltsplatzhalter 1">
@@ -5945,7 +5947,7 @@
             </p:txBody>
           </p:sp>
         </mc:Choice>
-        <mc:Fallback>
+        <mc:Fallback xmlns="">
           <p:sp>
             <p:nvSpPr>
               <p:cNvPr id="2" name="Inhaltsplatzhalter 1">
@@ -6260,8 +6262,8 @@
           <a:chExt cx="0" cy="0"/>
         </a:xfrm>
       </p:grpSpPr>
-      <mc:AlternateContent xmlns:mc="http://schemas.openxmlformats.org/markup-compatibility/2006">
-        <mc:Choice xmlns:a14="http://schemas.microsoft.com/office/drawing/2010/main" Requires="a14">
+      <mc:AlternateContent xmlns:mc="http://schemas.openxmlformats.org/markup-compatibility/2006" xmlns:a14="http://schemas.microsoft.com/office/drawing/2010/main">
+        <mc:Choice Requires="a14">
           <p:sp>
             <p:nvSpPr>
               <p:cNvPr id="2" name="Inhaltsplatzhalter 1">
@@ -6796,7 +6798,7 @@
             </p:txBody>
           </p:sp>
         </mc:Choice>
-        <mc:Fallback>
+        <mc:Fallback xmlns="">
           <p:sp>
             <p:nvSpPr>
               <p:cNvPr id="2" name="Inhaltsplatzhalter 1">
@@ -6893,8 +6895,8 @@
         </p:blipFill>
         <p:spPr bwMode="auto">
           <a:xfrm>
-            <a:off x="7995077" y="2449775"/>
-            <a:ext cx="2794000" cy="2882900"/>
+            <a:off x="7995076" y="1130142"/>
+            <a:ext cx="4072939" cy="4202533"/>
           </a:xfrm>
           <a:prstGeom prst="rect">
             <a:avLst/>
@@ -7031,56 +7033,854 @@
           <a:chExt cx="0" cy="0"/>
         </a:xfrm>
       </p:grpSpPr>
-      <p:sp>
-        <p:nvSpPr>
-          <p:cNvPr id="2" name="Inhaltsplatzhalter 1">
-            <a:extLst>
-              <a:ext uri="{FF2B5EF4-FFF2-40B4-BE49-F238E27FC236}">
-                <a16:creationId xmlns:a16="http://schemas.microsoft.com/office/drawing/2014/main" id="{700D2D49-9E19-9984-F79C-E2CEFB26CB0C}"/>
-              </a:ext>
-            </a:extLst>
-          </p:cNvPr>
-          <p:cNvSpPr>
-            <a:spLocks noGrp="1"/>
-          </p:cNvSpPr>
-          <p:nvPr>
-            <p:ph idx="1"/>
-          </p:nvPr>
-        </p:nvSpPr>
-        <p:spPr/>
-        <p:txBody>
-          <a:bodyPr/>
-          <a:lstStyle/>
-          <a:p>
-            <a:pPr marL="0" indent="0">
-              <a:buNone/>
-            </a:pPr>
-            <a:r>
-              <a:rPr lang="de-DE" dirty="0"/>
-              <a:t>Wiederum man kann die Formel aus der Vorlesung anwenden</a:t>
-            </a:r>
-          </a:p>
-          <a:p>
-            <a:pPr marL="0" indent="0">
-              <a:buNone/>
-            </a:pPr>
-            <a:endParaRPr lang="de-DE" dirty="0"/>
-          </a:p>
-          <a:p>
-            <a:pPr marL="0" indent="0">
-              <a:buNone/>
-            </a:pPr>
-            <a:r>
-              <a:rPr lang="de-DE" dirty="0" err="1"/>
-              <a:t>Zb</a:t>
-            </a:r>
-            <a:r>
-              <a:rPr lang="de-DE" dirty="0"/>
-              <a:t> für </a:t>
-            </a:r>
-          </a:p>
-        </p:txBody>
-      </p:sp>
+      <mc:AlternateContent xmlns:mc="http://schemas.openxmlformats.org/markup-compatibility/2006">
+        <mc:Choice xmlns:a14="http://schemas.microsoft.com/office/drawing/2010/main" Requires="a14">
+          <p:sp>
+            <p:nvSpPr>
+              <p:cNvPr id="2" name="Inhaltsplatzhalter 1">
+                <a:extLst>
+                  <a:ext uri="{FF2B5EF4-FFF2-40B4-BE49-F238E27FC236}">
+                    <a16:creationId xmlns:a16="http://schemas.microsoft.com/office/drawing/2014/main" id="{700D2D49-9E19-9984-F79C-E2CEFB26CB0C}"/>
+                  </a:ext>
+                </a:extLst>
+              </p:cNvPr>
+              <p:cNvSpPr>
+                <a:spLocks noGrp="1"/>
+              </p:cNvSpPr>
+              <p:nvPr>
+                <p:ph idx="1"/>
+              </p:nvPr>
+            </p:nvSpPr>
+            <p:spPr/>
+            <p:txBody>
+              <a:bodyPr/>
+              <a:lstStyle/>
+              <a:p>
+                <a:pPr marL="0" indent="0">
+                  <a:buNone/>
+                </a:pPr>
+                <a:r>
+                  <a:rPr lang="de-DE" dirty="0"/>
+                  <a:t>Eine fundamentale Identität die wir hier brauchen ist der Satz von De </a:t>
+                </a:r>
+                <a:r>
+                  <a:rPr lang="de-DE" dirty="0" err="1"/>
+                  <a:t>Moivre</a:t>
+                </a:r>
+                <a:endParaRPr lang="de-DE" dirty="0"/>
+              </a:p>
+              <a:p>
+                <a:pPr marL="0" indent="0">
+                  <a:buNone/>
+                </a:pPr>
+                <a:endParaRPr lang="de-DE" dirty="0"/>
+              </a:p>
+              <a:p>
+                <a:pPr marL="0" indent="0">
+                  <a:buNone/>
+                </a:pPr>
+                <a:r>
+                  <a:rPr lang="de-DE" dirty="0"/>
+                  <a:t>Es gilt </a:t>
+                </a:r>
+                <a14:m>
+                  <m:oMath xmlns:m="http://schemas.openxmlformats.org/officeDocument/2006/math">
+                    <m:sSup>
+                      <m:sSupPr>
+                        <m:ctrlPr>
+                          <a:rPr lang="de-AT" b="0" i="1" smtClean="0">
+                            <a:latin typeface="Cambria Math" panose="02040503050406030204" pitchFamily="18" charset="0"/>
+                          </a:rPr>
+                        </m:ctrlPr>
+                      </m:sSupPr>
+                      <m:e>
+                        <m:d>
+                          <m:dPr>
+                            <m:ctrlPr>
+                              <a:rPr lang="de-AT" b="0" i="1" smtClean="0">
+                                <a:latin typeface="Cambria Math" panose="02040503050406030204" pitchFamily="18" charset="0"/>
+                              </a:rPr>
+                            </m:ctrlPr>
+                          </m:dPr>
+                          <m:e>
+                            <m:sSup>
+                              <m:sSupPr>
+                                <m:ctrlPr>
+                                  <a:rPr lang="de-AT" b="0" i="1" smtClean="0">
+                                    <a:latin typeface="Cambria Math" panose="02040503050406030204" pitchFamily="18" charset="0"/>
+                                  </a:rPr>
+                                </m:ctrlPr>
+                              </m:sSupPr>
+                              <m:e>
+                                <m:r>
+                                  <a:rPr lang="de-AT" b="0" i="1" smtClean="0">
+                                    <a:latin typeface="Cambria Math" panose="02040503050406030204" pitchFamily="18" charset="0"/>
+                                  </a:rPr>
+                                  <m:t>𝑒</m:t>
+                                </m:r>
+                              </m:e>
+                              <m:sup>
+                                <m:r>
+                                  <a:rPr lang="de-AT" b="0" i="1" smtClean="0">
+                                    <a:latin typeface="Cambria Math" panose="02040503050406030204" pitchFamily="18" charset="0"/>
+                                  </a:rPr>
+                                  <m:t>𝑖</m:t>
+                                </m:r>
+                                <m:r>
+                                  <a:rPr lang="de-AT" b="0" i="1" smtClean="0">
+                                    <a:latin typeface="Cambria Math" panose="02040503050406030204" pitchFamily="18" charset="0"/>
+                                  </a:rPr>
+                                  <m:t>𝜙</m:t>
+                                </m:r>
+                              </m:sup>
+                            </m:sSup>
+                          </m:e>
+                        </m:d>
+                      </m:e>
+                      <m:sup>
+                        <m:r>
+                          <a:rPr lang="de-AT" b="0" i="1" smtClean="0">
+                            <a:latin typeface="Cambria Math" panose="02040503050406030204" pitchFamily="18" charset="0"/>
+                          </a:rPr>
+                          <m:t>𝑛</m:t>
+                        </m:r>
+                      </m:sup>
+                    </m:sSup>
+                    <m:r>
+                      <a:rPr lang="de-AT" b="0" i="1" smtClean="0">
+                        <a:latin typeface="Cambria Math" panose="02040503050406030204" pitchFamily="18" charset="0"/>
+                      </a:rPr>
+                      <m:t>=</m:t>
+                    </m:r>
+                    <m:sSup>
+                      <m:sSupPr>
+                        <m:ctrlPr>
+                          <a:rPr lang="de-AT" b="0" i="1" smtClean="0">
+                            <a:latin typeface="Cambria Math" panose="02040503050406030204" pitchFamily="18" charset="0"/>
+                          </a:rPr>
+                        </m:ctrlPr>
+                      </m:sSupPr>
+                      <m:e>
+                        <m:r>
+                          <a:rPr lang="de-AT" b="0" i="1" smtClean="0">
+                            <a:latin typeface="Cambria Math" panose="02040503050406030204" pitchFamily="18" charset="0"/>
+                          </a:rPr>
+                          <m:t>𝑒</m:t>
+                        </m:r>
+                      </m:e>
+                      <m:sup>
+                        <m:r>
+                          <a:rPr lang="de-AT" b="0" i="1" smtClean="0">
+                            <a:latin typeface="Cambria Math" panose="02040503050406030204" pitchFamily="18" charset="0"/>
+                          </a:rPr>
+                          <m:t>𝑖𝑛</m:t>
+                        </m:r>
+                        <m:r>
+                          <a:rPr lang="de-AT" b="0" i="1" smtClean="0">
+                            <a:latin typeface="Cambria Math" panose="02040503050406030204" pitchFamily="18" charset="0"/>
+                          </a:rPr>
+                          <m:t>𝜙</m:t>
+                        </m:r>
+                      </m:sup>
+                    </m:sSup>
+                  </m:oMath>
+                </a14:m>
+                <a:r>
+                  <a:rPr lang="de-DE" dirty="0"/>
+                  <a:t> und damit für jede reelle Zahl </a:t>
+                </a:r>
+                <a14:m>
+                  <m:oMath xmlns:m="http://schemas.openxmlformats.org/officeDocument/2006/math">
+                    <m:r>
+                      <a:rPr lang="de-AT" b="0" i="1" smtClean="0">
+                        <a:latin typeface="Cambria Math" panose="02040503050406030204" pitchFamily="18" charset="0"/>
+                      </a:rPr>
+                      <m:t>𝑟</m:t>
+                    </m:r>
+                    <m:r>
+                      <a:rPr lang="de-AT" b="0" i="1" smtClean="0">
+                        <a:latin typeface="Cambria Math" panose="02040503050406030204" pitchFamily="18" charset="0"/>
+                      </a:rPr>
+                      <m:t>&gt;0 </m:t>
+                    </m:r>
+                  </m:oMath>
+                </a14:m>
+                <a:r>
+                  <a:rPr lang="de-DE" dirty="0"/>
+                  <a:t> eine:</a:t>
+                </a:r>
+              </a:p>
+              <a:p>
+                <a:pPr marL="0" indent="0">
+                  <a:buNone/>
+                </a:pPr>
+                <a:endParaRPr lang="de-DE" dirty="0"/>
+              </a:p>
+              <a:p>
+                <a:pPr marL="0" indent="0">
+                  <a:buNone/>
+                </a:pPr>
+                <a14:m>
+                  <m:oMath xmlns:m="http://schemas.openxmlformats.org/officeDocument/2006/math">
+                    <m:sSup>
+                      <m:sSupPr>
+                        <m:ctrlPr>
+                          <a:rPr lang="de-AT" b="0" i="1" smtClean="0">
+                            <a:latin typeface="Cambria Math" panose="02040503050406030204" pitchFamily="18" charset="0"/>
+                          </a:rPr>
+                        </m:ctrlPr>
+                      </m:sSupPr>
+                      <m:e>
+                        <m:d>
+                          <m:dPr>
+                            <m:ctrlPr>
+                              <a:rPr lang="de-AT" b="0" i="1" smtClean="0">
+                                <a:latin typeface="Cambria Math" panose="02040503050406030204" pitchFamily="18" charset="0"/>
+                              </a:rPr>
+                            </m:ctrlPr>
+                          </m:dPr>
+                          <m:e>
+                            <m:r>
+                              <a:rPr lang="de-AT" b="0" i="1" smtClean="0">
+                                <a:latin typeface="Cambria Math" panose="02040503050406030204" pitchFamily="18" charset="0"/>
+                              </a:rPr>
+                              <m:t>𝑟</m:t>
+                            </m:r>
+                            <m:d>
+                              <m:dPr>
+                                <m:ctrlPr>
+                                  <a:rPr lang="de-AT" b="0" i="1" smtClean="0">
+                                    <a:latin typeface="Cambria Math" panose="02040503050406030204" pitchFamily="18" charset="0"/>
+                                  </a:rPr>
+                                </m:ctrlPr>
+                              </m:dPr>
+                              <m:e>
+                                <m:r>
+                                  <a:rPr lang="de-AT" b="0" i="1" smtClean="0">
+                                    <a:latin typeface="Cambria Math" panose="02040503050406030204" pitchFamily="18" charset="0"/>
+                                  </a:rPr>
+                                  <m:t>𝑐𝑜𝑠</m:t>
+                                </m:r>
+                                <m:r>
+                                  <a:rPr lang="de-AT" b="0" i="1" smtClean="0">
+                                    <a:latin typeface="Cambria Math" panose="02040503050406030204" pitchFamily="18" charset="0"/>
+                                  </a:rPr>
+                                  <m:t>𝜙</m:t>
+                                </m:r>
+                                <m:r>
+                                  <a:rPr lang="de-AT" b="0" i="1" smtClean="0">
+                                    <a:latin typeface="Cambria Math" panose="02040503050406030204" pitchFamily="18" charset="0"/>
+                                  </a:rPr>
+                                  <m:t>+</m:t>
+                                </m:r>
+                                <m:r>
+                                  <a:rPr lang="de-AT" b="0" i="1" smtClean="0">
+                                    <a:latin typeface="Cambria Math" panose="02040503050406030204" pitchFamily="18" charset="0"/>
+                                  </a:rPr>
+                                  <m:t>𝑖𝑠𝑖𝑛</m:t>
+                                </m:r>
+                                <m:r>
+                                  <a:rPr lang="de-AT" b="0" i="1" smtClean="0">
+                                    <a:latin typeface="Cambria Math" panose="02040503050406030204" pitchFamily="18" charset="0"/>
+                                  </a:rPr>
+                                  <m:t>𝜙</m:t>
+                                </m:r>
+                              </m:e>
+                            </m:d>
+                          </m:e>
+                        </m:d>
+                      </m:e>
+                      <m:sup>
+                        <m:r>
+                          <a:rPr lang="de-AT" b="0" i="1" smtClean="0">
+                            <a:latin typeface="Cambria Math" panose="02040503050406030204" pitchFamily="18" charset="0"/>
+                          </a:rPr>
+                          <m:t>𝑛</m:t>
+                        </m:r>
+                      </m:sup>
+                    </m:sSup>
+                    <m:r>
+                      <a:rPr lang="de-AT" b="0" i="1" smtClean="0">
+                        <a:latin typeface="Cambria Math" panose="02040503050406030204" pitchFamily="18" charset="0"/>
+                      </a:rPr>
+                      <m:t>=</m:t>
+                    </m:r>
+                    <m:sSup>
+                      <m:sSupPr>
+                        <m:ctrlPr>
+                          <a:rPr lang="de-AT" b="0" i="1" smtClean="0">
+                            <a:latin typeface="Cambria Math" panose="02040503050406030204" pitchFamily="18" charset="0"/>
+                          </a:rPr>
+                        </m:ctrlPr>
+                      </m:sSupPr>
+                      <m:e>
+                        <m:r>
+                          <a:rPr lang="de-AT" b="0" i="1" smtClean="0">
+                            <a:latin typeface="Cambria Math" panose="02040503050406030204" pitchFamily="18" charset="0"/>
+                          </a:rPr>
+                          <m:t>𝑟</m:t>
+                        </m:r>
+                      </m:e>
+                      <m:sup>
+                        <m:r>
+                          <a:rPr lang="de-AT" b="0" i="1" smtClean="0">
+                            <a:latin typeface="Cambria Math" panose="02040503050406030204" pitchFamily="18" charset="0"/>
+                          </a:rPr>
+                          <m:t>𝑛</m:t>
+                        </m:r>
+                      </m:sup>
+                    </m:sSup>
+                    <m:r>
+                      <a:rPr lang="de-AT" b="0" i="1" smtClean="0">
+                        <a:latin typeface="Cambria Math" panose="02040503050406030204" pitchFamily="18" charset="0"/>
+                      </a:rPr>
+                      <m:t>(</m:t>
+                    </m:r>
+                    <m:r>
+                      <m:rPr>
+                        <m:sty m:val="p"/>
+                      </m:rPr>
+                      <a:rPr lang="de-AT" b="0" i="0" smtClean="0">
+                        <a:latin typeface="Cambria Math" panose="02040503050406030204" pitchFamily="18" charset="0"/>
+                      </a:rPr>
+                      <m:t>cos</m:t>
+                    </m:r>
+                    <m:r>
+                      <a:rPr lang="de-AT" b="0" i="1" smtClean="0">
+                        <a:latin typeface="Cambria Math" panose="02040503050406030204" pitchFamily="18" charset="0"/>
+                      </a:rPr>
+                      <m:t>⁡(</m:t>
+                    </m:r>
+                    <m:r>
+                      <a:rPr lang="de-AT" b="0" i="1" smtClean="0">
+                        <a:latin typeface="Cambria Math" panose="02040503050406030204" pitchFamily="18" charset="0"/>
+                      </a:rPr>
+                      <m:t>𝑛</m:t>
+                    </m:r>
+                    <m:r>
+                      <a:rPr lang="de-AT" b="0" i="1" smtClean="0">
+                        <a:latin typeface="Cambria Math" panose="02040503050406030204" pitchFamily="18" charset="0"/>
+                      </a:rPr>
+                      <m:t>𝜙</m:t>
+                    </m:r>
+                    <m:r>
+                      <a:rPr lang="de-AT" b="0" i="1" smtClean="0">
+                        <a:latin typeface="Cambria Math" panose="02040503050406030204" pitchFamily="18" charset="0"/>
+                      </a:rPr>
+                      <m:t>)+</m:t>
+                    </m:r>
+                    <m:r>
+                      <a:rPr lang="de-AT" b="0" i="1" smtClean="0">
+                        <a:latin typeface="Cambria Math" panose="02040503050406030204" pitchFamily="18" charset="0"/>
+                      </a:rPr>
+                      <m:t>𝑖𝑠𝑖𝑛</m:t>
+                    </m:r>
+                    <m:d>
+                      <m:dPr>
+                        <m:ctrlPr>
+                          <a:rPr lang="de-AT" b="0" i="1" smtClean="0">
+                            <a:latin typeface="Cambria Math" panose="02040503050406030204" pitchFamily="18" charset="0"/>
+                          </a:rPr>
+                        </m:ctrlPr>
+                      </m:dPr>
+                      <m:e>
+                        <m:r>
+                          <a:rPr lang="de-AT" b="0" i="1" smtClean="0">
+                            <a:latin typeface="Cambria Math" panose="02040503050406030204" pitchFamily="18" charset="0"/>
+                          </a:rPr>
+                          <m:t>𝑛</m:t>
+                        </m:r>
+                        <m:r>
+                          <a:rPr lang="de-AT" b="0" i="1" smtClean="0">
+                            <a:latin typeface="Cambria Math" panose="02040503050406030204" pitchFamily="18" charset="0"/>
+                          </a:rPr>
+                          <m:t>𝜙</m:t>
+                        </m:r>
+                      </m:e>
+                    </m:d>
+                    <m:r>
+                      <a:rPr lang="de-AT" b="0" i="1" smtClean="0">
+                        <a:latin typeface="Cambria Math" panose="02040503050406030204" pitchFamily="18" charset="0"/>
+                      </a:rPr>
+                      <m:t>)</m:t>
+                    </m:r>
+                  </m:oMath>
+                </a14:m>
+                <a:r>
+                  <a:rPr lang="de-DE" dirty="0"/>
+                  <a:t> </a:t>
+                </a:r>
+              </a:p>
+              <a:p>
+                <a:pPr marL="0" indent="0">
+                  <a:buNone/>
+                </a:pPr>
+                <a:endParaRPr lang="de-DE" dirty="0"/>
+              </a:p>
+              <a:p>
+                <a:pPr marL="0" indent="0">
+                  <a:buNone/>
+                </a:pPr>
+                <a:r>
+                  <a:rPr lang="de-DE" dirty="0"/>
+                  <a:t>Betrachte </a:t>
+                </a:r>
+                <a:r>
+                  <a:rPr lang="de-DE" dirty="0" err="1"/>
+                  <a:t>zb</a:t>
+                </a:r>
+                <a:r>
+                  <a:rPr lang="de-DE" dirty="0"/>
+                  <a:t> </a:t>
+                </a:r>
+                <a14:m>
+                  <m:oMath xmlns:m="http://schemas.openxmlformats.org/officeDocument/2006/math">
+                    <m:sSup>
+                      <m:sSupPr>
+                        <m:ctrlPr>
+                          <a:rPr lang="de-AT" b="0" i="1" smtClean="0">
+                            <a:latin typeface="Cambria Math" panose="02040503050406030204" pitchFamily="18" charset="0"/>
+                          </a:rPr>
+                        </m:ctrlPr>
+                      </m:sSupPr>
+                      <m:e>
+                        <m:r>
+                          <a:rPr lang="de-AT" b="0" i="1" smtClean="0">
+                            <a:latin typeface="Cambria Math" panose="02040503050406030204" pitchFamily="18" charset="0"/>
+                          </a:rPr>
+                          <m:t>𝑧</m:t>
+                        </m:r>
+                      </m:e>
+                      <m:sup>
+                        <m:r>
+                          <a:rPr lang="de-AT" b="0" i="1" smtClean="0">
+                            <a:latin typeface="Cambria Math" panose="02040503050406030204" pitchFamily="18" charset="0"/>
+                          </a:rPr>
+                          <m:t>3</m:t>
+                        </m:r>
+                      </m:sup>
+                    </m:sSup>
+                    <m:r>
+                      <a:rPr lang="de-AT" b="0" i="1" smtClean="0">
+                        <a:latin typeface="Cambria Math" panose="02040503050406030204" pitchFamily="18" charset="0"/>
+                      </a:rPr>
+                      <m:t>=</m:t>
+                    </m:r>
+                    <m:r>
+                      <a:rPr lang="de-AT" b="0" i="1" smtClean="0">
+                        <a:latin typeface="Cambria Math" panose="02040503050406030204" pitchFamily="18" charset="0"/>
+                      </a:rPr>
+                      <m:t>𝑖</m:t>
+                    </m:r>
+                  </m:oMath>
+                </a14:m>
+                <a:r>
+                  <a:rPr lang="de-DE" dirty="0"/>
+                  <a:t> wandeln wir in die Exponentialform um </a:t>
+                </a:r>
+                <a14:m>
+                  <m:oMath xmlns:m="http://schemas.openxmlformats.org/officeDocument/2006/math">
+                    <m:d>
+                      <m:dPr>
+                        <m:begChr m:val="|"/>
+                        <m:endChr m:val="|"/>
+                        <m:ctrlPr>
+                          <a:rPr lang="de-AT" b="0" i="1" smtClean="0">
+                            <a:latin typeface="Cambria Math" panose="02040503050406030204" pitchFamily="18" charset="0"/>
+                          </a:rPr>
+                        </m:ctrlPr>
+                      </m:dPr>
+                      <m:e>
+                        <m:r>
+                          <a:rPr lang="de-AT" b="0" i="1" smtClean="0">
+                            <a:latin typeface="Cambria Math" panose="02040503050406030204" pitchFamily="18" charset="0"/>
+                          </a:rPr>
+                          <m:t>𝑧</m:t>
+                        </m:r>
+                      </m:e>
+                    </m:d>
+                    <m:r>
+                      <a:rPr lang="de-AT" b="0" i="1" smtClean="0">
+                        <a:latin typeface="Cambria Math" panose="02040503050406030204" pitchFamily="18" charset="0"/>
+                      </a:rPr>
+                      <m:t>=1</m:t>
+                    </m:r>
+                  </m:oMath>
+                </a14:m>
+                <a:r>
+                  <a:rPr lang="de-DE" dirty="0"/>
+                  <a:t> und </a:t>
+                </a:r>
+                <a14:m>
+                  <m:oMath xmlns:m="http://schemas.openxmlformats.org/officeDocument/2006/math">
+                    <m:func>
+                      <m:funcPr>
+                        <m:ctrlPr>
+                          <a:rPr lang="de-AT" b="0" i="1" smtClean="0">
+                            <a:latin typeface="Cambria Math" panose="02040503050406030204" pitchFamily="18" charset="0"/>
+                          </a:rPr>
+                        </m:ctrlPr>
+                      </m:funcPr>
+                      <m:fName>
+                        <m:r>
+                          <m:rPr>
+                            <m:sty m:val="p"/>
+                          </m:rPr>
+                          <a:rPr lang="de-AT" b="0" i="0" smtClean="0">
+                            <a:latin typeface="Cambria Math" panose="02040503050406030204" pitchFamily="18" charset="0"/>
+                          </a:rPr>
+                          <m:t>arccos</m:t>
+                        </m:r>
+                      </m:fName>
+                      <m:e>
+                        <m:d>
+                          <m:dPr>
+                            <m:ctrlPr>
+                              <a:rPr lang="de-AT" b="0" i="1" smtClean="0">
+                                <a:latin typeface="Cambria Math" panose="02040503050406030204" pitchFamily="18" charset="0"/>
+                              </a:rPr>
+                            </m:ctrlPr>
+                          </m:dPr>
+                          <m:e>
+                            <m:r>
+                              <a:rPr lang="de-AT" b="0" i="1" smtClean="0">
+                                <a:latin typeface="Cambria Math" panose="02040503050406030204" pitchFamily="18" charset="0"/>
+                              </a:rPr>
+                              <m:t>0</m:t>
+                            </m:r>
+                          </m:e>
+                        </m:d>
+                      </m:e>
+                    </m:func>
+                    <m:r>
+                      <a:rPr lang="de-AT" b="0" i="1" smtClean="0">
+                        <a:latin typeface="Cambria Math" panose="02040503050406030204" pitchFamily="18" charset="0"/>
+                      </a:rPr>
+                      <m:t>=</m:t>
+                    </m:r>
+                    <m:r>
+                      <a:rPr lang="de-AT" b="0" i="1" smtClean="0">
+                        <a:latin typeface="Cambria Math" panose="02040503050406030204" pitchFamily="18" charset="0"/>
+                      </a:rPr>
+                      <m:t>𝜋</m:t>
+                    </m:r>
+                    <m:r>
+                      <a:rPr lang="de-AT" b="0" i="1" smtClean="0">
+                        <a:latin typeface="Cambria Math" panose="02040503050406030204" pitchFamily="18" charset="0"/>
+                      </a:rPr>
+                      <m:t>/2 </m:t>
+                    </m:r>
+                  </m:oMath>
+                </a14:m>
+                <a:r>
+                  <a:rPr lang="de-DE" dirty="0"/>
+                  <a:t> </a:t>
+                </a:r>
+              </a:p>
+              <a:p>
+                <a:pPr marL="0" indent="0">
+                  <a:buNone/>
+                </a:pPr>
+                <a:r>
+                  <a:rPr lang="de-DE" dirty="0"/>
+                  <a:t>Das gibt </a:t>
+                </a:r>
+                <a14:m>
+                  <m:oMath xmlns:m="http://schemas.openxmlformats.org/officeDocument/2006/math">
+                    <m:r>
+                      <a:rPr lang="de-AT" b="0" i="1" smtClean="0">
+                        <a:latin typeface="Cambria Math" panose="02040503050406030204" pitchFamily="18" charset="0"/>
+                      </a:rPr>
+                      <m:t>𝑖</m:t>
+                    </m:r>
+                    <m:r>
+                      <a:rPr lang="de-AT" b="0" i="1" smtClean="0">
+                        <a:latin typeface="Cambria Math" panose="02040503050406030204" pitchFamily="18" charset="0"/>
+                      </a:rPr>
+                      <m:t>=1</m:t>
+                    </m:r>
+                    <m:sSup>
+                      <m:sSupPr>
+                        <m:ctrlPr>
+                          <a:rPr lang="de-AT" b="0" i="1" smtClean="0">
+                            <a:latin typeface="Cambria Math" panose="02040503050406030204" pitchFamily="18" charset="0"/>
+                          </a:rPr>
+                        </m:ctrlPr>
+                      </m:sSupPr>
+                      <m:e>
+                        <m:r>
+                          <a:rPr lang="de-AT" b="0" i="1" smtClean="0">
+                            <a:latin typeface="Cambria Math" panose="02040503050406030204" pitchFamily="18" charset="0"/>
+                          </a:rPr>
+                          <m:t>𝑒</m:t>
+                        </m:r>
+                      </m:e>
+                      <m:sup>
+                        <m:f>
+                          <m:fPr>
+                            <m:ctrlPr>
+                              <a:rPr lang="de-AT" b="0" i="1" smtClean="0">
+                                <a:latin typeface="Cambria Math" panose="02040503050406030204" pitchFamily="18" charset="0"/>
+                              </a:rPr>
+                            </m:ctrlPr>
+                          </m:fPr>
+                          <m:num>
+                            <m:r>
+                              <a:rPr lang="de-AT" b="0" i="1" smtClean="0">
+                                <a:latin typeface="Cambria Math" panose="02040503050406030204" pitchFamily="18" charset="0"/>
+                              </a:rPr>
+                              <m:t>𝑖</m:t>
+                            </m:r>
+                            <m:r>
+                              <a:rPr lang="de-AT" b="0" i="1" smtClean="0">
+                                <a:latin typeface="Cambria Math" panose="02040503050406030204" pitchFamily="18" charset="0"/>
+                              </a:rPr>
+                              <m:t>𝜋</m:t>
+                            </m:r>
+                          </m:num>
+                          <m:den>
+                            <m:r>
+                              <a:rPr lang="de-AT" b="0" i="1" smtClean="0">
+                                <a:latin typeface="Cambria Math" panose="02040503050406030204" pitchFamily="18" charset="0"/>
+                              </a:rPr>
+                              <m:t>2</m:t>
+                            </m:r>
+                          </m:den>
+                        </m:f>
+                      </m:sup>
+                    </m:sSup>
+                  </m:oMath>
+                </a14:m>
+                <a:r>
+                  <a:rPr lang="de-DE" dirty="0"/>
+                  <a:t> damit kann man die Formel aus der VO folgendes Ableiten:</a:t>
+                </a:r>
+              </a:p>
+              <a:p>
+                <a:pPr marL="0" indent="0">
+                  <a:buNone/>
+                </a:pPr>
+                <a14:m>
+                  <m:oMath xmlns:m="http://schemas.openxmlformats.org/officeDocument/2006/math">
+                    <m:rad>
+                      <m:radPr>
+                        <m:ctrlPr>
+                          <a:rPr lang="de-DE" i="1" smtClean="0">
+                            <a:latin typeface="Cambria Math" panose="02040503050406030204" pitchFamily="18" charset="0"/>
+                          </a:rPr>
+                        </m:ctrlPr>
+                      </m:radPr>
+                      <m:deg>
+                        <m:r>
+                          <m:rPr>
+                            <m:brk m:alnAt="7"/>
+                          </m:rPr>
+                          <a:rPr lang="de-AT" b="0" i="1" smtClean="0">
+                            <a:latin typeface="Cambria Math" panose="02040503050406030204" pitchFamily="18" charset="0"/>
+                          </a:rPr>
+                          <m:t>𝑛</m:t>
+                        </m:r>
+                      </m:deg>
+                      <m:e>
+                        <m:r>
+                          <a:rPr lang="de-AT" b="0" i="1" smtClean="0">
+                            <a:latin typeface="Cambria Math" panose="02040503050406030204" pitchFamily="18" charset="0"/>
+                          </a:rPr>
+                          <m:t>𝑧</m:t>
+                        </m:r>
+                      </m:e>
+                    </m:rad>
+                    <m:r>
+                      <a:rPr lang="de-AT" b="0" i="1" smtClean="0">
+                        <a:latin typeface="Cambria Math" panose="02040503050406030204" pitchFamily="18" charset="0"/>
+                      </a:rPr>
+                      <m:t>=</m:t>
+                    </m:r>
+                    <m:rad>
+                      <m:radPr>
+                        <m:ctrlPr>
+                          <a:rPr lang="de-AT" b="0" i="1" smtClean="0">
+                            <a:latin typeface="Cambria Math" panose="02040503050406030204" pitchFamily="18" charset="0"/>
+                          </a:rPr>
+                        </m:ctrlPr>
+                      </m:radPr>
+                      <m:deg>
+                        <m:r>
+                          <m:rPr>
+                            <m:brk m:alnAt="7"/>
+                          </m:rPr>
+                          <a:rPr lang="de-AT" b="0" i="1" smtClean="0">
+                            <a:latin typeface="Cambria Math" panose="02040503050406030204" pitchFamily="18" charset="0"/>
+                          </a:rPr>
+                          <m:t>𝑛</m:t>
+                        </m:r>
+                      </m:deg>
+                      <m:e>
+                        <m:r>
+                          <a:rPr lang="de-AT" b="0" i="1" smtClean="0">
+                            <a:latin typeface="Cambria Math" panose="02040503050406030204" pitchFamily="18" charset="0"/>
+                          </a:rPr>
+                          <m:t>𝑟</m:t>
+                        </m:r>
+                      </m:e>
+                    </m:rad>
+                    <m:sSup>
+                      <m:sSupPr>
+                        <m:ctrlPr>
+                          <a:rPr lang="de-AT" b="0" i="1" smtClean="0">
+                            <a:latin typeface="Cambria Math" panose="02040503050406030204" pitchFamily="18" charset="0"/>
+                          </a:rPr>
+                        </m:ctrlPr>
+                      </m:sSupPr>
+                      <m:e>
+                        <m:r>
+                          <a:rPr lang="de-AT" b="0" i="1" smtClean="0">
+                            <a:latin typeface="Cambria Math" panose="02040503050406030204" pitchFamily="18" charset="0"/>
+                          </a:rPr>
+                          <m:t>𝑒</m:t>
+                        </m:r>
+                      </m:e>
+                      <m:sup>
+                        <m:f>
+                          <m:fPr>
+                            <m:ctrlPr>
+                              <a:rPr lang="de-AT" b="0" i="1" smtClean="0">
+                                <a:latin typeface="Cambria Math" panose="02040503050406030204" pitchFamily="18" charset="0"/>
+                              </a:rPr>
+                            </m:ctrlPr>
+                          </m:fPr>
+                          <m:num>
+                            <m:r>
+                              <a:rPr lang="de-AT" b="0" i="1" smtClean="0">
+                                <a:latin typeface="Cambria Math" panose="02040503050406030204" pitchFamily="18" charset="0"/>
+                              </a:rPr>
+                              <m:t>𝑖</m:t>
+                            </m:r>
+                            <m:d>
+                              <m:dPr>
+                                <m:ctrlPr>
+                                  <a:rPr lang="de-AT" b="0" i="1" smtClean="0">
+                                    <a:latin typeface="Cambria Math" panose="02040503050406030204" pitchFamily="18" charset="0"/>
+                                  </a:rPr>
+                                </m:ctrlPr>
+                              </m:dPr>
+                              <m:e>
+                                <m:r>
+                                  <a:rPr lang="de-AT" b="0" i="1" smtClean="0">
+                                    <a:latin typeface="Cambria Math" panose="02040503050406030204" pitchFamily="18" charset="0"/>
+                                  </a:rPr>
+                                  <m:t>𝜙</m:t>
+                                </m:r>
+                                <m:r>
+                                  <a:rPr lang="de-AT" b="0" i="1" smtClean="0">
+                                    <a:latin typeface="Cambria Math" panose="02040503050406030204" pitchFamily="18" charset="0"/>
+                                  </a:rPr>
+                                  <m:t>+2</m:t>
+                                </m:r>
+                                <m:r>
+                                  <a:rPr lang="de-AT" b="0" i="1" smtClean="0">
+                                    <a:latin typeface="Cambria Math" panose="02040503050406030204" pitchFamily="18" charset="0"/>
+                                  </a:rPr>
+                                  <m:t>𝑘</m:t>
+                                </m:r>
+                                <m:r>
+                                  <a:rPr lang="de-AT" b="0" i="1" smtClean="0">
+                                    <a:latin typeface="Cambria Math" panose="02040503050406030204" pitchFamily="18" charset="0"/>
+                                  </a:rPr>
+                                  <m:t>𝜋</m:t>
+                                </m:r>
+                              </m:e>
+                            </m:d>
+                          </m:num>
+                          <m:den>
+                            <m:r>
+                              <a:rPr lang="de-AT" b="0" i="1" smtClean="0">
+                                <a:latin typeface="Cambria Math" panose="02040503050406030204" pitchFamily="18" charset="0"/>
+                              </a:rPr>
+                              <m:t>2</m:t>
+                            </m:r>
+                          </m:den>
+                        </m:f>
+                        <m:r>
+                          <a:rPr lang="de-AT" b="0" i="1" smtClean="0">
+                            <a:latin typeface="Cambria Math" panose="02040503050406030204" pitchFamily="18" charset="0"/>
+                          </a:rPr>
+                          <m:t> </m:t>
+                        </m:r>
+                      </m:sup>
+                    </m:sSup>
+                  </m:oMath>
+                </a14:m>
+                <a:r>
+                  <a:rPr lang="de-DE" dirty="0"/>
+                  <a:t> das Theorem von De </a:t>
+                </a:r>
+                <a:r>
+                  <a:rPr lang="de-DE" dirty="0" err="1"/>
+                  <a:t>Moive</a:t>
+                </a:r>
+                <a:r>
+                  <a:rPr lang="de-DE" dirty="0"/>
+                  <a:t> </a:t>
+                </a:r>
+                <a:r>
+                  <a:rPr lang="de-DE" dirty="0" err="1"/>
+                  <a:t>bzw</a:t>
+                </a:r>
+                <a:r>
+                  <a:rPr lang="de-DE" dirty="0"/>
+                  <a:t> die Umwandlung zwischen Polar/Exponentialform gibt uns dann ein Ergebnis</a:t>
+                </a:r>
+              </a:p>
+              <a:p>
+                <a:pPr marL="0" indent="0">
+                  <a:buNone/>
+                </a:pPr>
+                <a:endParaRPr lang="de-DE" dirty="0"/>
+              </a:p>
+            </p:txBody>
+          </p:sp>
+        </mc:Choice>
+        <mc:Fallback>
+          <p:sp>
+            <p:nvSpPr>
+              <p:cNvPr id="2" name="Inhaltsplatzhalter 1">
+                <a:extLst>
+                  <a:ext uri="{FF2B5EF4-FFF2-40B4-BE49-F238E27FC236}">
+                    <a16:creationId xmlns:a16="http://schemas.microsoft.com/office/drawing/2014/main" id="{700D2D49-9E19-9984-F79C-E2CEFB26CB0C}"/>
+                  </a:ext>
+                </a:extLst>
+              </p:cNvPr>
+              <p:cNvSpPr>
+                <a:spLocks noGrp="1" noRot="1" noChangeAspect="1" noMove="1" noResize="1" noEditPoints="1" noAdjustHandles="1" noChangeArrowheads="1" noChangeShapeType="1" noTextEdit="1"/>
+              </p:cNvSpPr>
+              <p:nvPr>
+                <p:ph idx="1"/>
+              </p:nvPr>
+            </p:nvSpPr>
+            <p:spPr>
+              <a:blipFill>
+                <a:blip r:embed="rId2"/>
+                <a:stretch>
+                  <a:fillRect l="-467" t="-1067"/>
+                </a:stretch>
+              </a:blipFill>
+            </p:spPr>
+            <p:txBody>
+              <a:bodyPr/>
+              <a:lstStyle/>
+              <a:p>
+                <a:r>
+                  <a:rPr lang="de-DE">
+                    <a:noFill/>
+                  </a:rPr>
+                  <a:t> </a:t>
+                </a:r>
+              </a:p>
+            </p:txBody>
+          </p:sp>
+        </mc:Fallback>
+      </mc:AlternateContent>
       <p:sp>
         <p:nvSpPr>
           <p:cNvPr id="3" name="Titel 2">
@@ -7129,6 +7929,1381 @@
     <p:extLst>
       <p:ext uri="{BB962C8B-B14F-4D97-AF65-F5344CB8AC3E}">
         <p14:creationId xmlns:p14="http://schemas.microsoft.com/office/powerpoint/2010/main" val="993104656"/>
+      </p:ext>
+    </p:extLst>
+  </p:cSld>
+  <p:clrMapOvr>
+    <a:masterClrMapping/>
+  </p:clrMapOvr>
+</p:sld>
+</file>
+
+<file path=ppt/slides/slide8.xml><?xml version="1.0" encoding="utf-8"?>
+<p:sld xmlns:a="http://schemas.openxmlformats.org/drawingml/2006/main" xmlns:r="http://schemas.openxmlformats.org/officeDocument/2006/relationships" xmlns:p="http://schemas.openxmlformats.org/presentationml/2006/main">
+  <p:cSld>
+    <p:spTree>
+      <p:nvGrpSpPr>
+        <p:cNvPr id="1" name=""/>
+        <p:cNvGrpSpPr/>
+        <p:nvPr/>
+      </p:nvGrpSpPr>
+      <p:grpSpPr>
+        <a:xfrm>
+          <a:off x="0" y="0"/>
+          <a:ext cx="0" cy="0"/>
+          <a:chOff x="0" y="0"/>
+          <a:chExt cx="0" cy="0"/>
+        </a:xfrm>
+      </p:grpSpPr>
+      <p:sp>
+        <p:nvSpPr>
+          <p:cNvPr id="2" name="Titel 1">
+            <a:extLst>
+              <a:ext uri="{FF2B5EF4-FFF2-40B4-BE49-F238E27FC236}">
+                <a16:creationId xmlns:a16="http://schemas.microsoft.com/office/drawing/2014/main" id="{8B9648AD-23AB-FCFA-FFFB-E76A360D62A3}"/>
+              </a:ext>
+            </a:extLst>
+          </p:cNvPr>
+          <p:cNvSpPr>
+            <a:spLocks noGrp="1"/>
+          </p:cNvSpPr>
+          <p:nvPr>
+            <p:ph type="title"/>
+          </p:nvPr>
+        </p:nvSpPr>
+        <p:spPr/>
+        <p:txBody>
+          <a:bodyPr/>
+          <a:lstStyle/>
+          <a:p>
+            <a:r>
+              <a:rPr lang="de-DE" dirty="0"/>
+              <a:t>Beispiel mit dem Theorem von de </a:t>
+            </a:r>
+            <a:r>
+              <a:rPr lang="de-DE" dirty="0" err="1"/>
+              <a:t>Moive</a:t>
+            </a:r>
+            <a:endParaRPr lang="de-DE" dirty="0"/>
+          </a:p>
+        </p:txBody>
+      </p:sp>
+      <p:sp>
+        <p:nvSpPr>
+          <p:cNvPr id="3" name="Datumsplatzhalter 2">
+            <a:extLst>
+              <a:ext uri="{FF2B5EF4-FFF2-40B4-BE49-F238E27FC236}">
+                <a16:creationId xmlns:a16="http://schemas.microsoft.com/office/drawing/2014/main" id="{FF083D5A-A46E-060E-D286-E20CBFF9D9C9}"/>
+              </a:ext>
+            </a:extLst>
+          </p:cNvPr>
+          <p:cNvSpPr>
+            <a:spLocks noGrp="1"/>
+          </p:cNvSpPr>
+          <p:nvPr>
+            <p:ph type="dt" sz="half" idx="2"/>
+          </p:nvPr>
+        </p:nvSpPr>
+        <p:spPr/>
+        <p:txBody>
+          <a:bodyPr/>
+          <a:lstStyle/>
+          <a:p>
+            <a:pPr algn="ctr"/>
+            <a:fld id="{7C3CDC0F-71BF-B840-812C-9588125E0BFE}" type="datetime6">
+              <a:rPr lang="de-AT" smtClean="0"/>
+              <a:pPr algn="ctr"/>
+              <a:t>November 24</a:t>
+            </a:fld>
+            <a:endParaRPr lang="de-AT" dirty="0"/>
+          </a:p>
+        </p:txBody>
+      </p:sp>
+      <p:sp>
+        <p:nvSpPr>
+          <p:cNvPr id="4" name="Fußzeilenplatzhalter 3">
+            <a:extLst>
+              <a:ext uri="{FF2B5EF4-FFF2-40B4-BE49-F238E27FC236}">
+                <a16:creationId xmlns:a16="http://schemas.microsoft.com/office/drawing/2014/main" id="{5620BF7C-EA61-2D6D-A0E4-79833BC27320}"/>
+              </a:ext>
+            </a:extLst>
+          </p:cNvPr>
+          <p:cNvSpPr>
+            <a:spLocks noGrp="1"/>
+          </p:cNvSpPr>
+          <p:nvPr>
+            <p:ph type="ftr" sz="quarter" idx="3"/>
+          </p:nvPr>
+        </p:nvSpPr>
+        <p:spPr/>
+        <p:txBody>
+          <a:bodyPr/>
+          <a:lstStyle/>
+          <a:p>
+            <a:pPr algn="ctr"/>
+            <a:r>
+              <a:rPr lang="de-AT"/>
+              <a:t>Titel oder Vortragender</a:t>
+            </a:r>
+            <a:endParaRPr lang="de-AT" dirty="0"/>
+          </a:p>
+        </p:txBody>
+      </p:sp>
+      <p:sp>
+        <p:nvSpPr>
+          <p:cNvPr id="5" name="Foliennummernplatzhalter 4">
+            <a:extLst>
+              <a:ext uri="{FF2B5EF4-FFF2-40B4-BE49-F238E27FC236}">
+                <a16:creationId xmlns:a16="http://schemas.microsoft.com/office/drawing/2014/main" id="{5AA93888-282C-114D-3C7B-0096633B24B2}"/>
+              </a:ext>
+            </a:extLst>
+          </p:cNvPr>
+          <p:cNvSpPr>
+            <a:spLocks noGrp="1"/>
+          </p:cNvSpPr>
+          <p:nvPr>
+            <p:ph type="sldNum" sz="quarter" idx="4"/>
+          </p:nvPr>
+        </p:nvSpPr>
+        <p:spPr/>
+        <p:txBody>
+          <a:bodyPr/>
+          <a:lstStyle/>
+          <a:p>
+            <a:pPr algn="r"/>
+            <a:fld id="{EBA229B5-7CFD-BC45-B1DD-7E8FA6FF2A01}" type="slidenum">
+              <a:rPr lang="de-AT" smtClean="0"/>
+              <a:pPr algn="r"/>
+              <a:t>8</a:t>
+            </a:fld>
+            <a:endParaRPr lang="de-AT" dirty="0"/>
+          </a:p>
+        </p:txBody>
+      </p:sp>
+      <mc:AlternateContent xmlns:mc="http://schemas.openxmlformats.org/markup-compatibility/2006">
+        <mc:Choice xmlns:a14="http://schemas.microsoft.com/office/drawing/2010/main" Requires="a14">
+          <p:sp>
+            <p:nvSpPr>
+              <p:cNvPr id="7" name="Textfeld 6">
+                <a:extLst>
+                  <a:ext uri="{FF2B5EF4-FFF2-40B4-BE49-F238E27FC236}">
+                    <a16:creationId xmlns:a16="http://schemas.microsoft.com/office/drawing/2014/main" id="{BA44143D-3156-C3AA-71FF-545D4E1FC8C1}"/>
+                  </a:ext>
+                </a:extLst>
+              </p:cNvPr>
+              <p:cNvSpPr txBox="1"/>
+              <p:nvPr/>
+            </p:nvSpPr>
+            <p:spPr>
+              <a:xfrm>
+                <a:off x="939114" y="1309816"/>
+                <a:ext cx="9811939" cy="3065711"/>
+              </a:xfrm>
+              <a:prstGeom prst="rect">
+                <a:avLst/>
+              </a:prstGeom>
+              <a:noFill/>
+            </p:spPr>
+            <p:txBody>
+              <a:bodyPr wrap="square" rtlCol="0">
+                <a:spAutoFit/>
+              </a:bodyPr>
+              <a:lstStyle/>
+              <a:p>
+                <a14:m>
+                  <m:oMath xmlns:m="http://schemas.openxmlformats.org/officeDocument/2006/math">
+                    <m:sSub>
+                      <m:sSubPr>
+                        <m:ctrlPr>
+                          <a:rPr lang="de-AT" b="0" i="1" smtClean="0">
+                            <a:latin typeface="Cambria Math" panose="02040503050406030204" pitchFamily="18" charset="0"/>
+                          </a:rPr>
+                        </m:ctrlPr>
+                      </m:sSubPr>
+                      <m:e>
+                        <m:r>
+                          <a:rPr lang="de-AT" b="0" i="1" smtClean="0">
+                            <a:latin typeface="Cambria Math" panose="02040503050406030204" pitchFamily="18" charset="0"/>
+                          </a:rPr>
+                          <m:t>𝑧</m:t>
+                        </m:r>
+                      </m:e>
+                      <m:sub>
+                        <m:r>
+                          <a:rPr lang="de-AT" b="0" i="1" smtClean="0">
+                            <a:latin typeface="Cambria Math" panose="02040503050406030204" pitchFamily="18" charset="0"/>
+                          </a:rPr>
+                          <m:t>𝑘</m:t>
+                        </m:r>
+                      </m:sub>
+                    </m:sSub>
+                    <m:r>
+                      <a:rPr lang="de-AT" b="0" i="1" smtClean="0">
+                        <a:latin typeface="Cambria Math" panose="02040503050406030204" pitchFamily="18" charset="0"/>
+                      </a:rPr>
+                      <m:t>=</m:t>
+                    </m:r>
+                    <m:sSup>
+                      <m:sSupPr>
+                        <m:ctrlPr>
+                          <a:rPr lang="de-AT" b="0" i="1" smtClean="0">
+                            <a:latin typeface="Cambria Math" panose="02040503050406030204" pitchFamily="18" charset="0"/>
+                          </a:rPr>
+                        </m:ctrlPr>
+                      </m:sSupPr>
+                      <m:e>
+                        <m:r>
+                          <a:rPr lang="de-AT" b="0" i="1" smtClean="0">
+                            <a:latin typeface="Cambria Math" panose="02040503050406030204" pitchFamily="18" charset="0"/>
+                          </a:rPr>
+                          <m:t>𝑒</m:t>
+                        </m:r>
+                      </m:e>
+                      <m:sup>
+                        <m:r>
+                          <a:rPr lang="de-AT" b="0" i="1" smtClean="0">
+                            <a:latin typeface="Cambria Math" panose="02040503050406030204" pitchFamily="18" charset="0"/>
+                          </a:rPr>
+                          <m:t>𝑖</m:t>
+                        </m:r>
+                        <m:f>
+                          <m:fPr>
+                            <m:ctrlPr>
+                              <a:rPr lang="de-AT" b="0" i="1" smtClean="0">
+                                <a:latin typeface="Cambria Math" panose="02040503050406030204" pitchFamily="18" charset="0"/>
+                              </a:rPr>
+                            </m:ctrlPr>
+                          </m:fPr>
+                          <m:num>
+                            <m:f>
+                              <m:fPr>
+                                <m:ctrlPr>
+                                  <a:rPr lang="de-AT" b="0" i="1" smtClean="0">
+                                    <a:latin typeface="Cambria Math" panose="02040503050406030204" pitchFamily="18" charset="0"/>
+                                  </a:rPr>
+                                </m:ctrlPr>
+                              </m:fPr>
+                              <m:num>
+                                <m:r>
+                                  <a:rPr lang="de-AT" b="0" i="1" smtClean="0">
+                                    <a:latin typeface="Cambria Math" panose="02040503050406030204" pitchFamily="18" charset="0"/>
+                                  </a:rPr>
+                                  <m:t>𝜋</m:t>
+                                </m:r>
+                              </m:num>
+                              <m:den>
+                                <m:r>
+                                  <a:rPr lang="de-AT" b="0" i="1" smtClean="0">
+                                    <a:latin typeface="Cambria Math" panose="02040503050406030204" pitchFamily="18" charset="0"/>
+                                  </a:rPr>
+                                  <m:t>2</m:t>
+                                </m:r>
+                              </m:den>
+                            </m:f>
+                            <m:r>
+                              <a:rPr lang="de-AT" b="0" i="1" smtClean="0">
+                                <a:latin typeface="Cambria Math" panose="02040503050406030204" pitchFamily="18" charset="0"/>
+                              </a:rPr>
+                              <m:t>+2</m:t>
+                            </m:r>
+                            <m:r>
+                              <a:rPr lang="de-AT" b="0" i="1" smtClean="0">
+                                <a:latin typeface="Cambria Math" panose="02040503050406030204" pitchFamily="18" charset="0"/>
+                              </a:rPr>
+                              <m:t>𝑘</m:t>
+                            </m:r>
+                            <m:r>
+                              <a:rPr lang="de-AT" b="0" i="1" smtClean="0">
+                                <a:latin typeface="Cambria Math" panose="02040503050406030204" pitchFamily="18" charset="0"/>
+                              </a:rPr>
+                              <m:t>𝜋</m:t>
+                            </m:r>
+                          </m:num>
+                          <m:den>
+                            <m:r>
+                              <a:rPr lang="de-AT" b="0" i="1" smtClean="0">
+                                <a:latin typeface="Cambria Math" panose="02040503050406030204" pitchFamily="18" charset="0"/>
+                              </a:rPr>
+                              <m:t>3</m:t>
+                            </m:r>
+                          </m:den>
+                        </m:f>
+                      </m:sup>
+                    </m:sSup>
+                  </m:oMath>
+                </a14:m>
+                <a:r>
+                  <a:rPr lang="de-DE" dirty="0"/>
+                  <a:t> mit </a:t>
+                </a:r>
+                <a14:m>
+                  <m:oMath xmlns:m="http://schemas.openxmlformats.org/officeDocument/2006/math">
+                    <m:r>
+                      <a:rPr lang="de-AT" b="0" i="1" smtClean="0">
+                        <a:latin typeface="Cambria Math" panose="02040503050406030204" pitchFamily="18" charset="0"/>
+                      </a:rPr>
+                      <m:t>𝑘</m:t>
+                    </m:r>
+                    <m:r>
+                      <a:rPr lang="de-AT" b="0" i="1" smtClean="0">
+                        <a:latin typeface="Cambria Math" panose="02040503050406030204" pitchFamily="18" charset="0"/>
+                      </a:rPr>
+                      <m:t>=0,1,2</m:t>
+                    </m:r>
+                  </m:oMath>
+                </a14:m>
+                <a:endParaRPr lang="de-DE" dirty="0"/>
+              </a:p>
+              <a:p>
+                <a:endParaRPr lang="de-DE" dirty="0"/>
+              </a:p>
+              <a:p>
+                <a:endParaRPr lang="de-DE" dirty="0"/>
+              </a:p>
+              <a:p>
+                <a:r>
+                  <a:rPr lang="de-DE" dirty="0"/>
+                  <a:t>Im Fall </a:t>
+                </a:r>
+                <a:r>
+                  <a:rPr lang="de-DE" dirty="0" err="1"/>
+                  <a:t>k</a:t>
+                </a:r>
+                <a:r>
+                  <a:rPr lang="de-DE" dirty="0"/>
+                  <a:t>=0:   </a:t>
+                </a:r>
+                <a14:m>
+                  <m:oMath xmlns:m="http://schemas.openxmlformats.org/officeDocument/2006/math">
+                    <m:sSup>
+                      <m:sSupPr>
+                        <m:ctrlPr>
+                          <a:rPr lang="de-AT" b="0" i="1" smtClean="0">
+                            <a:latin typeface="Cambria Math" panose="02040503050406030204" pitchFamily="18" charset="0"/>
+                          </a:rPr>
+                        </m:ctrlPr>
+                      </m:sSupPr>
+                      <m:e>
+                        <m:r>
+                          <a:rPr lang="de-AT" b="0" i="1" smtClean="0">
+                            <a:latin typeface="Cambria Math" panose="02040503050406030204" pitchFamily="18" charset="0"/>
+                          </a:rPr>
+                          <m:t>𝑒</m:t>
+                        </m:r>
+                      </m:e>
+                      <m:sup>
+                        <m:f>
+                          <m:fPr>
+                            <m:ctrlPr>
+                              <a:rPr lang="de-AT" b="0" i="1" smtClean="0">
+                                <a:latin typeface="Cambria Math" panose="02040503050406030204" pitchFamily="18" charset="0"/>
+                              </a:rPr>
+                            </m:ctrlPr>
+                          </m:fPr>
+                          <m:num>
+                            <m:r>
+                              <a:rPr lang="de-AT" b="0" i="1" smtClean="0">
+                                <a:latin typeface="Cambria Math" panose="02040503050406030204" pitchFamily="18" charset="0"/>
+                              </a:rPr>
+                              <m:t>𝑖</m:t>
+                            </m:r>
+                            <m:r>
+                              <a:rPr lang="de-AT" b="0" i="1" smtClean="0">
+                                <a:latin typeface="Cambria Math" panose="02040503050406030204" pitchFamily="18" charset="0"/>
+                              </a:rPr>
+                              <m:t>𝜋</m:t>
+                            </m:r>
+                          </m:num>
+                          <m:den>
+                            <m:r>
+                              <a:rPr lang="de-AT" b="0" i="1" smtClean="0">
+                                <a:latin typeface="Cambria Math" panose="02040503050406030204" pitchFamily="18" charset="0"/>
+                              </a:rPr>
+                              <m:t>3</m:t>
+                            </m:r>
+                          </m:den>
+                        </m:f>
+                      </m:sup>
+                    </m:sSup>
+                    <m:r>
+                      <a:rPr lang="de-AT" b="0" i="1" smtClean="0">
+                        <a:latin typeface="Cambria Math" panose="02040503050406030204" pitchFamily="18" charset="0"/>
+                      </a:rPr>
+                      <m:t>=</m:t>
+                    </m:r>
+                    <m:func>
+                      <m:funcPr>
+                        <m:ctrlPr>
+                          <a:rPr lang="de-AT" b="0" i="1" smtClean="0">
+                            <a:latin typeface="Cambria Math" panose="02040503050406030204" pitchFamily="18" charset="0"/>
+                          </a:rPr>
+                        </m:ctrlPr>
+                      </m:funcPr>
+                      <m:fName>
+                        <m:r>
+                          <m:rPr>
+                            <m:sty m:val="p"/>
+                          </m:rPr>
+                          <a:rPr lang="de-AT" b="0" i="0" smtClean="0">
+                            <a:latin typeface="Cambria Math" panose="02040503050406030204" pitchFamily="18" charset="0"/>
+                          </a:rPr>
+                          <m:t>cos</m:t>
+                        </m:r>
+                      </m:fName>
+                      <m:e>
+                        <m:d>
+                          <m:dPr>
+                            <m:ctrlPr>
+                              <a:rPr lang="de-AT" b="0" i="1" smtClean="0">
+                                <a:latin typeface="Cambria Math" panose="02040503050406030204" pitchFamily="18" charset="0"/>
+                              </a:rPr>
+                            </m:ctrlPr>
+                          </m:dPr>
+                          <m:e>
+                            <m:f>
+                              <m:fPr>
+                                <m:ctrlPr>
+                                  <a:rPr lang="de-AT" b="0" i="1" smtClean="0">
+                                    <a:latin typeface="Cambria Math" panose="02040503050406030204" pitchFamily="18" charset="0"/>
+                                  </a:rPr>
+                                </m:ctrlPr>
+                              </m:fPr>
+                              <m:num>
+                                <m:r>
+                                  <a:rPr lang="de-AT" b="0" i="1" smtClean="0">
+                                    <a:latin typeface="Cambria Math" panose="02040503050406030204" pitchFamily="18" charset="0"/>
+                                  </a:rPr>
+                                  <m:t>𝜋</m:t>
+                                </m:r>
+                              </m:num>
+                              <m:den>
+                                <m:r>
+                                  <a:rPr lang="de-AT" b="0" i="1" smtClean="0">
+                                    <a:latin typeface="Cambria Math" panose="02040503050406030204" pitchFamily="18" charset="0"/>
+                                  </a:rPr>
+                                  <m:t>6</m:t>
+                                </m:r>
+                              </m:den>
+                            </m:f>
+                          </m:e>
+                        </m:d>
+                      </m:e>
+                    </m:func>
+                    <m:r>
+                      <a:rPr lang="de-AT" b="0" i="1" smtClean="0">
+                        <a:latin typeface="Cambria Math" panose="02040503050406030204" pitchFamily="18" charset="0"/>
+                      </a:rPr>
+                      <m:t>+</m:t>
+                    </m:r>
+                    <m:r>
+                      <a:rPr lang="de-AT" b="0" i="1" smtClean="0">
+                        <a:latin typeface="Cambria Math" panose="02040503050406030204" pitchFamily="18" charset="0"/>
+                      </a:rPr>
+                      <m:t>𝑖𝑠𝑖𝑛</m:t>
+                    </m:r>
+                    <m:d>
+                      <m:dPr>
+                        <m:ctrlPr>
+                          <a:rPr lang="de-AT" b="0" i="1" smtClean="0">
+                            <a:latin typeface="Cambria Math" panose="02040503050406030204" pitchFamily="18" charset="0"/>
+                          </a:rPr>
+                        </m:ctrlPr>
+                      </m:dPr>
+                      <m:e>
+                        <m:f>
+                          <m:fPr>
+                            <m:ctrlPr>
+                              <a:rPr lang="de-AT" b="0" i="1" smtClean="0">
+                                <a:latin typeface="Cambria Math" panose="02040503050406030204" pitchFamily="18" charset="0"/>
+                              </a:rPr>
+                            </m:ctrlPr>
+                          </m:fPr>
+                          <m:num>
+                            <m:r>
+                              <a:rPr lang="de-AT" b="0" i="1" smtClean="0">
+                                <a:latin typeface="Cambria Math" panose="02040503050406030204" pitchFamily="18" charset="0"/>
+                              </a:rPr>
+                              <m:t>𝜋</m:t>
+                            </m:r>
+                          </m:num>
+                          <m:den>
+                            <m:r>
+                              <a:rPr lang="de-AT" b="0" i="1" smtClean="0">
+                                <a:latin typeface="Cambria Math" panose="02040503050406030204" pitchFamily="18" charset="0"/>
+                              </a:rPr>
+                              <m:t>6</m:t>
+                            </m:r>
+                          </m:den>
+                        </m:f>
+                      </m:e>
+                    </m:d>
+                    <m:r>
+                      <a:rPr lang="de-AT" b="0" i="1" smtClean="0">
+                        <a:latin typeface="Cambria Math" panose="02040503050406030204" pitchFamily="18" charset="0"/>
+                      </a:rPr>
+                      <m:t>= </m:t>
+                    </m:r>
+                    <m:f>
+                      <m:fPr>
+                        <m:ctrlPr>
+                          <a:rPr lang="de-AT" b="0" i="1" smtClean="0">
+                            <a:latin typeface="Cambria Math" panose="02040503050406030204" pitchFamily="18" charset="0"/>
+                          </a:rPr>
+                        </m:ctrlPr>
+                      </m:fPr>
+                      <m:num>
+                        <m:rad>
+                          <m:radPr>
+                            <m:degHide m:val="on"/>
+                            <m:ctrlPr>
+                              <a:rPr lang="de-AT" b="0" i="1" smtClean="0">
+                                <a:latin typeface="Cambria Math" panose="02040503050406030204" pitchFamily="18" charset="0"/>
+                              </a:rPr>
+                            </m:ctrlPr>
+                          </m:radPr>
+                          <m:deg/>
+                          <m:e>
+                            <m:r>
+                              <a:rPr lang="de-AT" b="0" i="1" smtClean="0">
+                                <a:latin typeface="Cambria Math" panose="02040503050406030204" pitchFamily="18" charset="0"/>
+                              </a:rPr>
+                              <m:t>3</m:t>
+                            </m:r>
+                          </m:e>
+                        </m:rad>
+                      </m:num>
+                      <m:den>
+                        <m:r>
+                          <a:rPr lang="de-AT" b="0" i="1" smtClean="0">
+                            <a:latin typeface="Cambria Math" panose="02040503050406030204" pitchFamily="18" charset="0"/>
+                          </a:rPr>
+                          <m:t>2</m:t>
+                        </m:r>
+                      </m:den>
+                    </m:f>
+                    <m:r>
+                      <a:rPr lang="de-AT" b="0" i="1" smtClean="0">
+                        <a:latin typeface="Cambria Math" panose="02040503050406030204" pitchFamily="18" charset="0"/>
+                      </a:rPr>
+                      <m:t>+</m:t>
+                    </m:r>
+                    <m:r>
+                      <a:rPr lang="de-AT" b="0" i="1" smtClean="0">
+                        <a:latin typeface="Cambria Math" panose="02040503050406030204" pitchFamily="18" charset="0"/>
+                      </a:rPr>
+                      <m:t>𝑖</m:t>
+                    </m:r>
+                    <m:f>
+                      <m:fPr>
+                        <m:ctrlPr>
+                          <a:rPr lang="de-AT" b="0" i="1" smtClean="0">
+                            <a:latin typeface="Cambria Math" panose="02040503050406030204" pitchFamily="18" charset="0"/>
+                          </a:rPr>
+                        </m:ctrlPr>
+                      </m:fPr>
+                      <m:num>
+                        <m:r>
+                          <a:rPr lang="de-AT" b="0" i="1" smtClean="0">
+                            <a:latin typeface="Cambria Math" panose="02040503050406030204" pitchFamily="18" charset="0"/>
+                          </a:rPr>
+                          <m:t>1</m:t>
+                        </m:r>
+                      </m:num>
+                      <m:den>
+                        <m:r>
+                          <a:rPr lang="de-AT" b="0" i="1" smtClean="0">
+                            <a:latin typeface="Cambria Math" panose="02040503050406030204" pitchFamily="18" charset="0"/>
+                          </a:rPr>
+                          <m:t>2</m:t>
+                        </m:r>
+                      </m:den>
+                    </m:f>
+                  </m:oMath>
+                </a14:m>
+                <a:endParaRPr lang="de-DE" dirty="0"/>
+              </a:p>
+              <a:p>
+                <a:endParaRPr lang="de-DE" dirty="0"/>
+              </a:p>
+              <a:p>
+                <a:r>
+                  <a:rPr lang="de-DE" dirty="0"/>
+                  <a:t>Im Fall </a:t>
+                </a:r>
+                <a:r>
+                  <a:rPr lang="de-DE" dirty="0" err="1"/>
+                  <a:t>k</a:t>
+                </a:r>
+                <a:r>
+                  <a:rPr lang="de-DE" dirty="0"/>
+                  <a:t>=1:  </a:t>
+                </a:r>
+                <a14:m>
+                  <m:oMath xmlns:m="http://schemas.openxmlformats.org/officeDocument/2006/math">
+                    <m:sSup>
+                      <m:sSupPr>
+                        <m:ctrlPr>
+                          <a:rPr lang="de-AT" b="0" i="1" smtClean="0">
+                            <a:latin typeface="Cambria Math" panose="02040503050406030204" pitchFamily="18" charset="0"/>
+                          </a:rPr>
+                        </m:ctrlPr>
+                      </m:sSupPr>
+                      <m:e>
+                        <m:r>
+                          <a:rPr lang="de-AT" b="0" i="1" smtClean="0">
+                            <a:latin typeface="Cambria Math" panose="02040503050406030204" pitchFamily="18" charset="0"/>
+                          </a:rPr>
+                          <m:t>𝑒</m:t>
+                        </m:r>
+                      </m:e>
+                      <m:sup>
+                        <m:f>
+                          <m:fPr>
+                            <m:ctrlPr>
+                              <a:rPr lang="de-AT" b="0" i="1" smtClean="0">
+                                <a:latin typeface="Cambria Math" panose="02040503050406030204" pitchFamily="18" charset="0"/>
+                              </a:rPr>
+                            </m:ctrlPr>
+                          </m:fPr>
+                          <m:num>
+                            <m:r>
+                              <a:rPr lang="de-AT" b="0" i="1" smtClean="0">
+                                <a:latin typeface="Cambria Math" panose="02040503050406030204" pitchFamily="18" charset="0"/>
+                              </a:rPr>
+                              <m:t>5</m:t>
+                            </m:r>
+                            <m:r>
+                              <a:rPr lang="de-AT" b="0" i="1" smtClean="0">
+                                <a:latin typeface="Cambria Math" panose="02040503050406030204" pitchFamily="18" charset="0"/>
+                              </a:rPr>
+                              <m:t>𝜋</m:t>
+                            </m:r>
+                          </m:num>
+                          <m:den>
+                            <m:r>
+                              <a:rPr lang="de-AT" b="0" i="1" smtClean="0">
+                                <a:latin typeface="Cambria Math" panose="02040503050406030204" pitchFamily="18" charset="0"/>
+                              </a:rPr>
+                              <m:t>6</m:t>
+                            </m:r>
+                          </m:den>
+                        </m:f>
+                      </m:sup>
+                    </m:sSup>
+                    <m:r>
+                      <a:rPr lang="de-AT" b="0" i="1" smtClean="0">
+                        <a:latin typeface="Cambria Math" panose="02040503050406030204" pitchFamily="18" charset="0"/>
+                      </a:rPr>
+                      <m:t>=</m:t>
+                    </m:r>
+                    <m:func>
+                      <m:funcPr>
+                        <m:ctrlPr>
+                          <a:rPr lang="de-AT" b="0" i="1" smtClean="0">
+                            <a:latin typeface="Cambria Math" panose="02040503050406030204" pitchFamily="18" charset="0"/>
+                          </a:rPr>
+                        </m:ctrlPr>
+                      </m:funcPr>
+                      <m:fName>
+                        <m:r>
+                          <m:rPr>
+                            <m:sty m:val="p"/>
+                          </m:rPr>
+                          <a:rPr lang="de-AT" b="0" i="0" smtClean="0">
+                            <a:latin typeface="Cambria Math" panose="02040503050406030204" pitchFamily="18" charset="0"/>
+                          </a:rPr>
+                          <m:t>cos</m:t>
+                        </m:r>
+                      </m:fName>
+                      <m:e>
+                        <m:d>
+                          <m:dPr>
+                            <m:ctrlPr>
+                              <a:rPr lang="de-AT" b="0" i="1" smtClean="0">
+                                <a:latin typeface="Cambria Math" panose="02040503050406030204" pitchFamily="18" charset="0"/>
+                              </a:rPr>
+                            </m:ctrlPr>
+                          </m:dPr>
+                          <m:e>
+                            <m:f>
+                              <m:fPr>
+                                <m:ctrlPr>
+                                  <a:rPr lang="de-AT" b="0" i="1" smtClean="0">
+                                    <a:latin typeface="Cambria Math" panose="02040503050406030204" pitchFamily="18" charset="0"/>
+                                  </a:rPr>
+                                </m:ctrlPr>
+                              </m:fPr>
+                              <m:num>
+                                <m:r>
+                                  <a:rPr lang="de-AT" b="0" i="1" smtClean="0">
+                                    <a:latin typeface="Cambria Math" panose="02040503050406030204" pitchFamily="18" charset="0"/>
+                                  </a:rPr>
+                                  <m:t>5</m:t>
+                                </m:r>
+                                <m:r>
+                                  <a:rPr lang="de-AT" b="0" i="1" smtClean="0">
+                                    <a:latin typeface="Cambria Math" panose="02040503050406030204" pitchFamily="18" charset="0"/>
+                                  </a:rPr>
+                                  <m:t>𝜋</m:t>
+                                </m:r>
+                              </m:num>
+                              <m:den>
+                                <m:r>
+                                  <a:rPr lang="de-AT" b="0" i="1" smtClean="0">
+                                    <a:latin typeface="Cambria Math" panose="02040503050406030204" pitchFamily="18" charset="0"/>
+                                  </a:rPr>
+                                  <m:t>6</m:t>
+                                </m:r>
+                              </m:den>
+                            </m:f>
+                          </m:e>
+                        </m:d>
+                      </m:e>
+                    </m:func>
+                    <m:r>
+                      <a:rPr lang="de-AT" b="0" i="1" smtClean="0">
+                        <a:latin typeface="Cambria Math" panose="02040503050406030204" pitchFamily="18" charset="0"/>
+                      </a:rPr>
+                      <m:t>+</m:t>
+                    </m:r>
+                    <m:r>
+                      <a:rPr lang="de-AT" b="0" i="1" smtClean="0">
+                        <a:latin typeface="Cambria Math" panose="02040503050406030204" pitchFamily="18" charset="0"/>
+                      </a:rPr>
+                      <m:t>𝑖𝑠𝑖𝑛</m:t>
+                    </m:r>
+                    <m:d>
+                      <m:dPr>
+                        <m:ctrlPr>
+                          <a:rPr lang="de-AT" b="0" i="1" smtClean="0">
+                            <a:latin typeface="Cambria Math" panose="02040503050406030204" pitchFamily="18" charset="0"/>
+                          </a:rPr>
+                        </m:ctrlPr>
+                      </m:dPr>
+                      <m:e>
+                        <m:f>
+                          <m:fPr>
+                            <m:ctrlPr>
+                              <a:rPr lang="de-AT" b="0" i="1" smtClean="0">
+                                <a:latin typeface="Cambria Math" panose="02040503050406030204" pitchFamily="18" charset="0"/>
+                              </a:rPr>
+                            </m:ctrlPr>
+                          </m:fPr>
+                          <m:num>
+                            <m:r>
+                              <a:rPr lang="de-AT" b="0" i="1" smtClean="0">
+                                <a:latin typeface="Cambria Math" panose="02040503050406030204" pitchFamily="18" charset="0"/>
+                              </a:rPr>
+                              <m:t>5</m:t>
+                            </m:r>
+                            <m:r>
+                              <a:rPr lang="de-AT" b="0" i="1" smtClean="0">
+                                <a:latin typeface="Cambria Math" panose="02040503050406030204" pitchFamily="18" charset="0"/>
+                              </a:rPr>
+                              <m:t>𝜋</m:t>
+                            </m:r>
+                          </m:num>
+                          <m:den>
+                            <m:r>
+                              <a:rPr lang="de-AT" b="0" i="1" smtClean="0">
+                                <a:latin typeface="Cambria Math" panose="02040503050406030204" pitchFamily="18" charset="0"/>
+                              </a:rPr>
+                              <m:t>6</m:t>
+                            </m:r>
+                          </m:den>
+                        </m:f>
+                      </m:e>
+                    </m:d>
+                    <m:r>
+                      <a:rPr lang="de-AT" b="0" i="1" smtClean="0">
+                        <a:latin typeface="Cambria Math" panose="02040503050406030204" pitchFamily="18" charset="0"/>
+                      </a:rPr>
+                      <m:t>=</m:t>
+                    </m:r>
+                    <m:f>
+                      <m:fPr>
+                        <m:ctrlPr>
+                          <a:rPr lang="de-AT" b="0" i="1" smtClean="0">
+                            <a:latin typeface="Cambria Math" panose="02040503050406030204" pitchFamily="18" charset="0"/>
+                          </a:rPr>
+                        </m:ctrlPr>
+                      </m:fPr>
+                      <m:num>
+                        <m:r>
+                          <a:rPr lang="de-AT" b="0" i="1" smtClean="0">
+                            <a:latin typeface="Cambria Math" panose="02040503050406030204" pitchFamily="18" charset="0"/>
+                          </a:rPr>
+                          <m:t>−</m:t>
+                        </m:r>
+                        <m:rad>
+                          <m:radPr>
+                            <m:degHide m:val="on"/>
+                            <m:ctrlPr>
+                              <a:rPr lang="de-AT" b="0" i="1" smtClean="0">
+                                <a:latin typeface="Cambria Math" panose="02040503050406030204" pitchFamily="18" charset="0"/>
+                              </a:rPr>
+                            </m:ctrlPr>
+                          </m:radPr>
+                          <m:deg/>
+                          <m:e>
+                            <m:r>
+                              <a:rPr lang="de-AT" b="0" i="1" smtClean="0">
+                                <a:latin typeface="Cambria Math" panose="02040503050406030204" pitchFamily="18" charset="0"/>
+                              </a:rPr>
+                              <m:t>3</m:t>
+                            </m:r>
+                          </m:e>
+                        </m:rad>
+                      </m:num>
+                      <m:den>
+                        <m:r>
+                          <a:rPr lang="de-AT" b="0" i="1" smtClean="0">
+                            <a:latin typeface="Cambria Math" panose="02040503050406030204" pitchFamily="18" charset="0"/>
+                          </a:rPr>
+                          <m:t>2</m:t>
+                        </m:r>
+                      </m:den>
+                    </m:f>
+                    <m:r>
+                      <a:rPr lang="de-AT" b="0" i="1" smtClean="0">
+                        <a:latin typeface="Cambria Math" panose="02040503050406030204" pitchFamily="18" charset="0"/>
+                      </a:rPr>
+                      <m:t>+</m:t>
+                    </m:r>
+                    <m:f>
+                      <m:fPr>
+                        <m:ctrlPr>
+                          <a:rPr lang="de-AT" b="0" i="1" smtClean="0">
+                            <a:latin typeface="Cambria Math" panose="02040503050406030204" pitchFamily="18" charset="0"/>
+                          </a:rPr>
+                        </m:ctrlPr>
+                      </m:fPr>
+                      <m:num>
+                        <m:r>
+                          <a:rPr lang="de-AT" b="0" i="1" smtClean="0">
+                            <a:latin typeface="Cambria Math" panose="02040503050406030204" pitchFamily="18" charset="0"/>
+                          </a:rPr>
+                          <m:t>𝑖</m:t>
+                        </m:r>
+                        <m:r>
+                          <a:rPr lang="de-AT" b="0" i="1" smtClean="0">
+                            <a:latin typeface="Cambria Math" panose="02040503050406030204" pitchFamily="18" charset="0"/>
+                          </a:rPr>
+                          <m:t>1</m:t>
+                        </m:r>
+                      </m:num>
+                      <m:den>
+                        <m:r>
+                          <a:rPr lang="de-AT" b="0" i="1" smtClean="0">
+                            <a:latin typeface="Cambria Math" panose="02040503050406030204" pitchFamily="18" charset="0"/>
+                          </a:rPr>
+                          <m:t>2</m:t>
+                        </m:r>
+                      </m:den>
+                    </m:f>
+                  </m:oMath>
+                </a14:m>
+                <a:endParaRPr lang="de-DE" dirty="0"/>
+              </a:p>
+              <a:p>
+                <a:endParaRPr lang="de-DE" dirty="0"/>
+              </a:p>
+              <a:p>
+                <a:r>
+                  <a:rPr lang="de-DE" dirty="0"/>
+                  <a:t>Im Fall </a:t>
+                </a:r>
+                <a:r>
+                  <a:rPr lang="de-DE" dirty="0" err="1"/>
+                  <a:t>k</a:t>
+                </a:r>
+                <a:r>
+                  <a:rPr lang="de-DE" dirty="0"/>
+                  <a:t>=2: </a:t>
+                </a:r>
+                <a14:m>
+                  <m:oMath xmlns:m="http://schemas.openxmlformats.org/officeDocument/2006/math">
+                    <m:sSup>
+                      <m:sSupPr>
+                        <m:ctrlPr>
+                          <a:rPr lang="de-AT" b="0" i="1" smtClean="0">
+                            <a:latin typeface="Cambria Math" panose="02040503050406030204" pitchFamily="18" charset="0"/>
+                          </a:rPr>
+                        </m:ctrlPr>
+                      </m:sSupPr>
+                      <m:e>
+                        <m:r>
+                          <a:rPr lang="de-AT" b="0" i="1" smtClean="0">
+                            <a:latin typeface="Cambria Math" panose="02040503050406030204" pitchFamily="18" charset="0"/>
+                          </a:rPr>
+                          <m:t>𝑒</m:t>
+                        </m:r>
+                      </m:e>
+                      <m:sup>
+                        <m:f>
+                          <m:fPr>
+                            <m:ctrlPr>
+                              <a:rPr lang="de-AT" b="0" i="1" smtClean="0">
+                                <a:latin typeface="Cambria Math" panose="02040503050406030204" pitchFamily="18" charset="0"/>
+                              </a:rPr>
+                            </m:ctrlPr>
+                          </m:fPr>
+                          <m:num>
+                            <m:r>
+                              <a:rPr lang="de-AT" b="0" i="1" smtClean="0">
+                                <a:latin typeface="Cambria Math" panose="02040503050406030204" pitchFamily="18" charset="0"/>
+                              </a:rPr>
+                              <m:t>𝑖</m:t>
+                            </m:r>
+                            <m:r>
+                              <a:rPr lang="de-AT" b="0" i="1" smtClean="0">
+                                <a:latin typeface="Cambria Math" panose="02040503050406030204" pitchFamily="18" charset="0"/>
+                              </a:rPr>
+                              <m:t>3</m:t>
+                            </m:r>
+                            <m:r>
+                              <a:rPr lang="de-AT" b="0" i="1" smtClean="0">
+                                <a:latin typeface="Cambria Math" panose="02040503050406030204" pitchFamily="18" charset="0"/>
+                              </a:rPr>
+                              <m:t>𝜋</m:t>
+                            </m:r>
+                          </m:num>
+                          <m:den>
+                            <m:r>
+                              <a:rPr lang="de-AT" b="0" i="1" smtClean="0">
+                                <a:latin typeface="Cambria Math" panose="02040503050406030204" pitchFamily="18" charset="0"/>
+                              </a:rPr>
+                              <m:t>2</m:t>
+                            </m:r>
+                          </m:den>
+                        </m:f>
+                      </m:sup>
+                    </m:sSup>
+                    <m:r>
+                      <a:rPr lang="de-AT" b="0" i="1" smtClean="0">
+                        <a:latin typeface="Cambria Math" panose="02040503050406030204" pitchFamily="18" charset="0"/>
+                      </a:rPr>
+                      <m:t>=</m:t>
+                    </m:r>
+                    <m:func>
+                      <m:funcPr>
+                        <m:ctrlPr>
+                          <a:rPr lang="de-AT" b="0" i="1" smtClean="0">
+                            <a:latin typeface="Cambria Math" panose="02040503050406030204" pitchFamily="18" charset="0"/>
+                          </a:rPr>
+                        </m:ctrlPr>
+                      </m:funcPr>
+                      <m:fName>
+                        <m:r>
+                          <m:rPr>
+                            <m:sty m:val="p"/>
+                          </m:rPr>
+                          <a:rPr lang="de-AT" b="0" i="0" smtClean="0">
+                            <a:latin typeface="Cambria Math" panose="02040503050406030204" pitchFamily="18" charset="0"/>
+                          </a:rPr>
+                          <m:t>cos</m:t>
+                        </m:r>
+                      </m:fName>
+                      <m:e>
+                        <m:d>
+                          <m:dPr>
+                            <m:ctrlPr>
+                              <a:rPr lang="de-AT" b="0" i="1" smtClean="0">
+                                <a:latin typeface="Cambria Math" panose="02040503050406030204" pitchFamily="18" charset="0"/>
+                              </a:rPr>
+                            </m:ctrlPr>
+                          </m:dPr>
+                          <m:e>
+                            <m:f>
+                              <m:fPr>
+                                <m:ctrlPr>
+                                  <a:rPr lang="de-AT" b="0" i="1" smtClean="0">
+                                    <a:latin typeface="Cambria Math" panose="02040503050406030204" pitchFamily="18" charset="0"/>
+                                  </a:rPr>
+                                </m:ctrlPr>
+                              </m:fPr>
+                              <m:num>
+                                <m:r>
+                                  <a:rPr lang="de-AT" b="0" i="1" smtClean="0">
+                                    <a:latin typeface="Cambria Math" panose="02040503050406030204" pitchFamily="18" charset="0"/>
+                                  </a:rPr>
+                                  <m:t>3</m:t>
+                                </m:r>
+                                <m:r>
+                                  <a:rPr lang="de-AT" b="0" i="1" smtClean="0">
+                                    <a:latin typeface="Cambria Math" panose="02040503050406030204" pitchFamily="18" charset="0"/>
+                                  </a:rPr>
+                                  <m:t>𝜋</m:t>
+                                </m:r>
+                              </m:num>
+                              <m:den>
+                                <m:r>
+                                  <a:rPr lang="de-AT" b="0" i="1" smtClean="0">
+                                    <a:latin typeface="Cambria Math" panose="02040503050406030204" pitchFamily="18" charset="0"/>
+                                  </a:rPr>
+                                  <m:t>2</m:t>
+                                </m:r>
+                              </m:den>
+                            </m:f>
+                          </m:e>
+                        </m:d>
+                      </m:e>
+                    </m:func>
+                    <m:r>
+                      <a:rPr lang="de-AT" b="0" i="1" smtClean="0">
+                        <a:latin typeface="Cambria Math" panose="02040503050406030204" pitchFamily="18" charset="0"/>
+                      </a:rPr>
+                      <m:t>+</m:t>
+                    </m:r>
+                    <m:r>
+                      <a:rPr lang="de-AT" b="0" i="1" smtClean="0">
+                        <a:latin typeface="Cambria Math" panose="02040503050406030204" pitchFamily="18" charset="0"/>
+                      </a:rPr>
+                      <m:t>𝑖𝑠𝑖𝑛</m:t>
+                    </m:r>
+                    <m:d>
+                      <m:dPr>
+                        <m:ctrlPr>
+                          <a:rPr lang="de-AT" b="0" i="1" smtClean="0">
+                            <a:latin typeface="Cambria Math" panose="02040503050406030204" pitchFamily="18" charset="0"/>
+                          </a:rPr>
+                        </m:ctrlPr>
+                      </m:dPr>
+                      <m:e>
+                        <m:f>
+                          <m:fPr>
+                            <m:ctrlPr>
+                              <a:rPr lang="de-AT" b="0" i="1" smtClean="0">
+                                <a:latin typeface="Cambria Math" panose="02040503050406030204" pitchFamily="18" charset="0"/>
+                              </a:rPr>
+                            </m:ctrlPr>
+                          </m:fPr>
+                          <m:num>
+                            <m:r>
+                              <a:rPr lang="de-AT" b="0" i="1" smtClean="0">
+                                <a:latin typeface="Cambria Math" panose="02040503050406030204" pitchFamily="18" charset="0"/>
+                              </a:rPr>
+                              <m:t>3</m:t>
+                            </m:r>
+                            <m:r>
+                              <a:rPr lang="de-AT" b="0" i="1" smtClean="0">
+                                <a:latin typeface="Cambria Math" panose="02040503050406030204" pitchFamily="18" charset="0"/>
+                              </a:rPr>
+                              <m:t>𝜋</m:t>
+                            </m:r>
+                          </m:num>
+                          <m:den>
+                            <m:r>
+                              <a:rPr lang="de-AT" b="0" i="1" smtClean="0">
+                                <a:latin typeface="Cambria Math" panose="02040503050406030204" pitchFamily="18" charset="0"/>
+                              </a:rPr>
+                              <m:t>2</m:t>
+                            </m:r>
+                          </m:den>
+                        </m:f>
+                      </m:e>
+                    </m:d>
+                    <m:r>
+                      <a:rPr lang="de-AT" b="0" i="1" smtClean="0">
+                        <a:latin typeface="Cambria Math" panose="02040503050406030204" pitchFamily="18" charset="0"/>
+                      </a:rPr>
+                      <m:t>=0 −</m:t>
+                    </m:r>
+                    <m:r>
+                      <a:rPr lang="de-AT" b="0" i="1" smtClean="0">
+                        <a:latin typeface="Cambria Math" panose="02040503050406030204" pitchFamily="18" charset="0"/>
+                      </a:rPr>
+                      <m:t>𝑖</m:t>
+                    </m:r>
+                    <m:r>
+                      <a:rPr lang="de-AT" b="0" i="1" smtClean="0">
+                        <a:latin typeface="Cambria Math" panose="02040503050406030204" pitchFamily="18" charset="0"/>
+                      </a:rPr>
+                      <m:t>=−</m:t>
+                    </m:r>
+                    <m:r>
+                      <a:rPr lang="de-AT" b="0" i="1" smtClean="0">
+                        <a:latin typeface="Cambria Math" panose="02040503050406030204" pitchFamily="18" charset="0"/>
+                      </a:rPr>
+                      <m:t>𝑖</m:t>
+                    </m:r>
+                  </m:oMath>
+                </a14:m>
+                <a:endParaRPr lang="de-DE" dirty="0"/>
+              </a:p>
+            </p:txBody>
+          </p:sp>
+        </mc:Choice>
+        <mc:Fallback>
+          <p:sp>
+            <p:nvSpPr>
+              <p:cNvPr id="7" name="Textfeld 6">
+                <a:extLst>
+                  <a:ext uri="{FF2B5EF4-FFF2-40B4-BE49-F238E27FC236}">
+                    <a16:creationId xmlns:a16="http://schemas.microsoft.com/office/drawing/2014/main" id="{BA44143D-3156-C3AA-71FF-545D4E1FC8C1}"/>
+                  </a:ext>
+                </a:extLst>
+              </p:cNvPr>
+              <p:cNvSpPr txBox="1">
+                <a:spLocks noRot="1" noChangeAspect="1" noMove="1" noResize="1" noEditPoints="1" noAdjustHandles="1" noChangeArrowheads="1" noChangeShapeType="1" noTextEdit="1"/>
+              </p:cNvSpPr>
+              <p:nvPr/>
+            </p:nvSpPr>
+            <p:spPr>
+              <a:xfrm>
+                <a:off x="939114" y="1309816"/>
+                <a:ext cx="9811939" cy="3065711"/>
+              </a:xfrm>
+              <a:prstGeom prst="rect">
+                <a:avLst/>
+              </a:prstGeom>
+              <a:blipFill>
+                <a:blip r:embed="rId2"/>
+                <a:stretch>
+                  <a:fillRect l="-388" b="-826"/>
+                </a:stretch>
+              </a:blipFill>
+            </p:spPr>
+            <p:txBody>
+              <a:bodyPr/>
+              <a:lstStyle/>
+              <a:p>
+                <a:r>
+                  <a:rPr lang="de-DE">
+                    <a:noFill/>
+                  </a:rPr>
+                  <a:t> </a:t>
+                </a:r>
+              </a:p>
+            </p:txBody>
+          </p:sp>
+        </mc:Fallback>
+      </mc:AlternateContent>
+      <p:pic>
+        <p:nvPicPr>
+          <p:cNvPr id="9" name="Grafik 8">
+            <a:extLst>
+              <a:ext uri="{FF2B5EF4-FFF2-40B4-BE49-F238E27FC236}">
+                <a16:creationId xmlns:a16="http://schemas.microsoft.com/office/drawing/2014/main" id="{7ACDFF51-69B7-3EAE-026F-0C89853727C5}"/>
+              </a:ext>
+            </a:extLst>
+          </p:cNvPr>
+          <p:cNvPicPr>
+            <a:picLocks noChangeAspect="1"/>
+          </p:cNvPicPr>
+          <p:nvPr/>
+        </p:nvPicPr>
+        <p:blipFill>
+          <a:blip r:embed="rId3"/>
+          <a:stretch>
+            <a:fillRect/>
+          </a:stretch>
+        </p:blipFill>
+        <p:spPr>
+          <a:xfrm>
+            <a:off x="6997998" y="306041"/>
+            <a:ext cx="4932130" cy="4972557"/>
+          </a:xfrm>
+          <a:prstGeom prst="rect">
+            <a:avLst/>
+          </a:prstGeom>
+        </p:spPr>
+      </p:pic>
+    </p:spTree>
+    <p:extLst>
+      <p:ext uri="{BB962C8B-B14F-4D97-AF65-F5344CB8AC3E}">
+        <p14:creationId xmlns:p14="http://schemas.microsoft.com/office/powerpoint/2010/main" val="2631000907"/>
+      </p:ext>
+    </p:extLst>
+  </p:cSld>
+  <p:clrMapOvr>
+    <a:masterClrMapping/>
+  </p:clrMapOvr>
+</p:sld>
+</file>
+
+<file path=ppt/slides/slide9.xml><?xml version="1.0" encoding="utf-8"?>
+<p:sld xmlns:a="http://schemas.openxmlformats.org/drawingml/2006/main" xmlns:r="http://schemas.openxmlformats.org/officeDocument/2006/relationships" xmlns:p="http://schemas.openxmlformats.org/presentationml/2006/main">
+  <p:cSld>
+    <p:spTree>
+      <p:nvGrpSpPr>
+        <p:cNvPr id="1" name=""/>
+        <p:cNvGrpSpPr/>
+        <p:nvPr/>
+      </p:nvGrpSpPr>
+      <p:grpSpPr>
+        <a:xfrm>
+          <a:off x="0" y="0"/>
+          <a:ext cx="0" cy="0"/>
+          <a:chOff x="0" y="0"/>
+          <a:chExt cx="0" cy="0"/>
+        </a:xfrm>
+      </p:grpSpPr>
+      <p:sp>
+        <p:nvSpPr>
+          <p:cNvPr id="2" name="Titel 1">
+            <a:extLst>
+              <a:ext uri="{FF2B5EF4-FFF2-40B4-BE49-F238E27FC236}">
+                <a16:creationId xmlns:a16="http://schemas.microsoft.com/office/drawing/2014/main" id="{5F17ED98-0FF6-B023-7AFE-807CA72391E8}"/>
+              </a:ext>
+            </a:extLst>
+          </p:cNvPr>
+          <p:cNvSpPr>
+            <a:spLocks noGrp="1"/>
+          </p:cNvSpPr>
+          <p:nvPr>
+            <p:ph type="title"/>
+          </p:nvPr>
+        </p:nvSpPr>
+        <p:spPr/>
+        <p:txBody>
+          <a:bodyPr/>
+          <a:lstStyle/>
+          <a:p>
+            <a:r>
+              <a:rPr lang="de-DE" dirty="0"/>
+              <a:t>Schauen wir uns das Mal genauer an:</a:t>
+            </a:r>
+          </a:p>
+        </p:txBody>
+      </p:sp>
+      <p:sp>
+        <p:nvSpPr>
+          <p:cNvPr id="3" name="Datumsplatzhalter 2">
+            <a:extLst>
+              <a:ext uri="{FF2B5EF4-FFF2-40B4-BE49-F238E27FC236}">
+                <a16:creationId xmlns:a16="http://schemas.microsoft.com/office/drawing/2014/main" id="{CF799DCA-22C5-82A9-8BE3-F555B917B9F0}"/>
+              </a:ext>
+            </a:extLst>
+          </p:cNvPr>
+          <p:cNvSpPr>
+            <a:spLocks noGrp="1"/>
+          </p:cNvSpPr>
+          <p:nvPr>
+            <p:ph type="dt" sz="half" idx="2"/>
+          </p:nvPr>
+        </p:nvSpPr>
+        <p:spPr/>
+        <p:txBody>
+          <a:bodyPr/>
+          <a:lstStyle/>
+          <a:p>
+            <a:pPr algn="ctr"/>
+            <a:fld id="{7C3CDC0F-71BF-B840-812C-9588125E0BFE}" type="datetime6">
+              <a:rPr lang="de-AT" smtClean="0"/>
+              <a:pPr algn="ctr"/>
+              <a:t>November 24</a:t>
+            </a:fld>
+            <a:endParaRPr lang="de-AT" dirty="0"/>
+          </a:p>
+        </p:txBody>
+      </p:sp>
+      <p:sp>
+        <p:nvSpPr>
+          <p:cNvPr id="4" name="Fußzeilenplatzhalter 3">
+            <a:extLst>
+              <a:ext uri="{FF2B5EF4-FFF2-40B4-BE49-F238E27FC236}">
+                <a16:creationId xmlns:a16="http://schemas.microsoft.com/office/drawing/2014/main" id="{D9649EAE-910C-07D9-D5FC-B91FE0321781}"/>
+              </a:ext>
+            </a:extLst>
+          </p:cNvPr>
+          <p:cNvSpPr>
+            <a:spLocks noGrp="1"/>
+          </p:cNvSpPr>
+          <p:nvPr>
+            <p:ph type="ftr" sz="quarter" idx="3"/>
+          </p:nvPr>
+        </p:nvSpPr>
+        <p:spPr/>
+        <p:txBody>
+          <a:bodyPr/>
+          <a:lstStyle/>
+          <a:p>
+            <a:pPr algn="ctr"/>
+            <a:r>
+              <a:rPr lang="de-AT"/>
+              <a:t>Titel oder Vortragender</a:t>
+            </a:r>
+            <a:endParaRPr lang="de-AT" dirty="0"/>
+          </a:p>
+        </p:txBody>
+      </p:sp>
+      <p:sp>
+        <p:nvSpPr>
+          <p:cNvPr id="5" name="Foliennummernplatzhalter 4">
+            <a:extLst>
+              <a:ext uri="{FF2B5EF4-FFF2-40B4-BE49-F238E27FC236}">
+                <a16:creationId xmlns:a16="http://schemas.microsoft.com/office/drawing/2014/main" id="{DA645F58-F90C-CDD5-8753-7028BA36684B}"/>
+              </a:ext>
+            </a:extLst>
+          </p:cNvPr>
+          <p:cNvSpPr>
+            <a:spLocks noGrp="1"/>
+          </p:cNvSpPr>
+          <p:nvPr>
+            <p:ph type="sldNum" sz="quarter" idx="4"/>
+          </p:nvPr>
+        </p:nvSpPr>
+        <p:spPr/>
+        <p:txBody>
+          <a:bodyPr/>
+          <a:lstStyle/>
+          <a:p>
+            <a:pPr algn="r"/>
+            <a:fld id="{EBA229B5-7CFD-BC45-B1DD-7E8FA6FF2A01}" type="slidenum">
+              <a:rPr lang="de-AT" smtClean="0"/>
+              <a:pPr algn="r"/>
+              <a:t>9</a:t>
+            </a:fld>
+            <a:endParaRPr lang="de-AT" dirty="0"/>
+          </a:p>
+        </p:txBody>
+      </p:sp>
+      <p:sp>
+        <p:nvSpPr>
+          <p:cNvPr id="7" name="Textfeld 6">
+            <a:extLst>
+              <a:ext uri="{FF2B5EF4-FFF2-40B4-BE49-F238E27FC236}">
+                <a16:creationId xmlns:a16="http://schemas.microsoft.com/office/drawing/2014/main" id="{879C957B-CD5F-9A9C-6DE5-8FA944EBA433}"/>
+              </a:ext>
+            </a:extLst>
+          </p:cNvPr>
+          <p:cNvSpPr txBox="1"/>
+          <p:nvPr/>
+        </p:nvSpPr>
+        <p:spPr>
+          <a:xfrm>
+            <a:off x="767408" y="1137507"/>
+            <a:ext cx="6122772" cy="369332"/>
+          </a:xfrm>
+          <a:prstGeom prst="rect">
+            <a:avLst/>
+          </a:prstGeom>
+          <a:noFill/>
+        </p:spPr>
+        <p:txBody>
+          <a:bodyPr wrap="square">
+            <a:spAutoFit/>
+          </a:bodyPr>
+          <a:lstStyle/>
+          <a:p>
+            <a:r>
+              <a:rPr lang="de-DE" dirty="0">
+                <a:hlinkClick r:id="rId2"/>
+              </a:rPr>
+              <a:t>https://www.geogebra.org/m/Nn3P8sje</a:t>
+            </a:r>
+            <a:r>
+              <a:rPr lang="de-DE" dirty="0"/>
+              <a:t> </a:t>
+            </a:r>
+          </a:p>
+        </p:txBody>
+      </p:sp>
+    </p:spTree>
+    <p:extLst>
+      <p:ext uri="{BB962C8B-B14F-4D97-AF65-F5344CB8AC3E}">
+        <p14:creationId xmlns:p14="http://schemas.microsoft.com/office/powerpoint/2010/main" val="2432678725"/>
       </p:ext>
     </p:extLst>
   </p:cSld>
